--- a/public/fun/cards/expert/expert-16.pptx
+++ b/public/fun/cards/expert/expert-16.pptx
@@ -3085,7 +3085,7 @@
     <p:bg>
       <p:bgPr>
         <a:solidFill>
-          <a:srgbClr val="F9F3F0"/>
+          <a:srgbClr val="0E1116"/>
         </a:solidFill>
         <a:effectLst/>
       </p:bgPr>
@@ -3099,217 +3099,14 @@
       <p:grpSpPr/>
       <p:sp>
         <p:nvSpPr>
-          <p:cNvPr id="2" name="Rectangle 1"/>
-          <p:cNvSpPr/>
+          <p:cNvPr id="2" name="텍스트"/>
+          <p:cNvSpPr txBox="1"/>
           <p:nvPr/>
         </p:nvSpPr>
         <p:spPr>
           <a:xfrm>
-            <a:off x="0" y="1339200"/>
-            <a:ext cx="3240000" cy="460800"/>
-          </a:xfrm>
-          <a:prstGeom prst="rect">
-            <a:avLst/>
-          </a:prstGeom>
-          <a:solidFill>
-            <a:srgbClr val="7D4531"/>
-          </a:solidFill>
-          <a:ln>
-            <a:noFill/>
-          </a:ln>
-        </p:spPr>
-        <p:txBody>
-          <a:bodyPr rtlCol="0" anchor="ctr"/>
-          <a:lstStyle/>
-          <a:p>
-            <a:pPr algn="ctr"/>
-          </a:p>
-        </p:txBody>
-      </p:sp>
-      <p:sp>
-        <p:nvSpPr>
-          <p:cNvPr id="3" name="Rectangle 2"/>
-          <p:cNvSpPr/>
-          <p:nvPr/>
-        </p:nvSpPr>
-        <p:spPr>
-          <a:xfrm>
-            <a:off x="2848320" y="249840"/>
-            <a:ext cx="63360" cy="364320"/>
-          </a:xfrm>
-          <a:prstGeom prst="rect">
-            <a:avLst/>
-          </a:prstGeom>
-          <a:solidFill>
-            <a:srgbClr val="7D4531"/>
-          </a:solidFill>
-          <a:ln>
-            <a:noFill/>
-          </a:ln>
-        </p:spPr>
-        <p:txBody>
-          <a:bodyPr rtlCol="0" anchor="ctr"/>
-          <a:lstStyle/>
-          <a:p>
-            <a:pPr algn="ctr"/>
-          </a:p>
-        </p:txBody>
-      </p:sp>
-      <p:sp>
-        <p:nvSpPr>
-          <p:cNvPr id="4" name="Rectangle 3"/>
-          <p:cNvSpPr/>
-          <p:nvPr/>
-        </p:nvSpPr>
-        <p:spPr>
-          <a:xfrm rot="2700000">
-            <a:off x="2848320" y="249840"/>
-            <a:ext cx="63360" cy="364320"/>
-          </a:xfrm>
-          <a:prstGeom prst="rect">
-            <a:avLst/>
-          </a:prstGeom>
-          <a:solidFill>
-            <a:srgbClr val="7D4531"/>
-          </a:solidFill>
-          <a:ln>
-            <a:noFill/>
-          </a:ln>
-        </p:spPr>
-        <p:txBody>
-          <a:bodyPr rtlCol="0" anchor="ctr"/>
-          <a:lstStyle/>
-          <a:p>
-            <a:pPr algn="ctr"/>
-          </a:p>
-        </p:txBody>
-      </p:sp>
-      <p:sp>
-        <p:nvSpPr>
-          <p:cNvPr id="5" name="Rectangle 4"/>
-          <p:cNvSpPr/>
-          <p:nvPr/>
-        </p:nvSpPr>
-        <p:spPr>
-          <a:xfrm rot="5400000">
-            <a:off x="2848320" y="249840"/>
-            <a:ext cx="63360" cy="364320"/>
-          </a:xfrm>
-          <a:prstGeom prst="rect">
-            <a:avLst/>
-          </a:prstGeom>
-          <a:solidFill>
-            <a:srgbClr val="7D4531"/>
-          </a:solidFill>
-          <a:ln>
-            <a:noFill/>
-          </a:ln>
-        </p:spPr>
-        <p:txBody>
-          <a:bodyPr rtlCol="0" anchor="ctr"/>
-          <a:lstStyle/>
-          <a:p>
-            <a:pPr algn="ctr"/>
-          </a:p>
-        </p:txBody>
-      </p:sp>
-      <p:sp>
-        <p:nvSpPr>
-          <p:cNvPr id="6" name="Rectangle 5"/>
-          <p:cNvSpPr/>
-          <p:nvPr/>
-        </p:nvSpPr>
-        <p:spPr>
-          <a:xfrm rot="8100000">
-            <a:off x="2848320" y="249840"/>
-            <a:ext cx="63360" cy="364320"/>
-          </a:xfrm>
-          <a:prstGeom prst="rect">
-            <a:avLst/>
-          </a:prstGeom>
-          <a:solidFill>
-            <a:srgbClr val="7D4531"/>
-          </a:solidFill>
-          <a:ln>
-            <a:noFill/>
-          </a:ln>
-        </p:spPr>
-        <p:txBody>
-          <a:bodyPr rtlCol="0" anchor="ctr"/>
-          <a:lstStyle/>
-          <a:p>
-            <a:pPr algn="ctr"/>
-          </a:p>
-        </p:txBody>
-      </p:sp>
-      <p:sp>
-        <p:nvSpPr>
-          <p:cNvPr id="7" name="Oval 6"/>
-          <p:cNvSpPr/>
-          <p:nvPr/>
-        </p:nvSpPr>
-        <p:spPr>
-          <a:xfrm>
-            <a:off x="2769120" y="321120"/>
-            <a:ext cx="221760" cy="221760"/>
-          </a:xfrm>
-          <a:prstGeom prst="ellipse">
-            <a:avLst/>
-          </a:prstGeom>
-          <a:solidFill>
-            <a:srgbClr val="7D4531"/>
-          </a:solidFill>
-          <a:ln>
-            <a:noFill/>
-          </a:ln>
-        </p:spPr>
-        <p:txBody>
-          <a:bodyPr rtlCol="0" anchor="ctr"/>
-          <a:lstStyle/>
-          <a:p>
-            <a:pPr algn="ctr"/>
-          </a:p>
-        </p:txBody>
-      </p:sp>
-      <p:sp>
-        <p:nvSpPr>
-          <p:cNvPr id="8" name="Oval 7"/>
-          <p:cNvSpPr/>
-          <p:nvPr/>
-        </p:nvSpPr>
-        <p:spPr>
-          <a:xfrm>
-            <a:off x="2832480" y="384480"/>
-            <a:ext cx="95040" cy="95040"/>
-          </a:xfrm>
-          <a:prstGeom prst="ellipse">
-            <a:avLst/>
-          </a:prstGeom>
-          <a:solidFill>
-            <a:srgbClr val="F4E4DF"/>
-          </a:solidFill>
-          <a:ln>
-            <a:noFill/>
-          </a:ln>
-        </p:spPr>
-        <p:txBody>
-          <a:bodyPr rtlCol="0" anchor="ctr"/>
-          <a:lstStyle/>
-          <a:p>
-            <a:pPr algn="ctr"/>
-          </a:p>
-        </p:txBody>
-      </p:sp>
-      <p:sp>
-        <p:nvSpPr>
-          <p:cNvPr id="9" name="텍스트"/>
-          <p:cNvSpPr txBox="1"/>
-          <p:nvPr/>
-        </p:nvSpPr>
-        <p:spPr>
-          <a:xfrm>
-            <a:off x="216000" y="230400"/>
-            <a:ext cx="2160000" cy="313692"/>
+            <a:off x="1584000" y="36000"/>
+            <a:ext cx="1656000" cy="1728000"/>
           </a:xfrm>
           <a:prstGeom prst="rect">
             <a:avLst/>
@@ -3317,39 +3114,39 @@
           <a:noFill/>
         </p:spPr>
         <p:txBody>
-          <a:bodyPr wrap="square" lIns="0" rIns="0" tIns="0" bIns="0" anchor="t">
+          <a:bodyPr wrap="square" lIns="0" rIns="0" tIns="0" bIns="0" anchor="ctr">
             <a:spAutoFit/>
           </a:bodyPr>
           <a:lstStyle/>
           <a:p>
-            <a:pPr algn="l">
+            <a:pPr algn="ctr">
               <a:lnSpc>
-                <a:spcPts val="2755"/>
+                <a:spcPts val="18560"/>
               </a:lnSpc>
             </a:pPr>
             <a:r>
-              <a:rPr sz="1900" b="1" spc="50">
+              <a:rPr sz="12800" b="1">
                 <a:solidFill>
-                  <a:srgbClr val="3B2017"/>
+                  <a:srgbClr val="26292D"/>
                 </a:solidFill>
                 <a:latin typeface="맑은 고딕"/>
                 <a:ea typeface="맑은 고딕"/>
               </a:rPr>
-              <a:t>황주원</a:t>
-            </a:r>
-          </a:p>
-        </p:txBody>
-      </p:sp>
-      <p:sp>
-        <p:nvSpPr>
-          <p:cNvPr id="10" name="텍스트"/>
+              <a:t>황</a:t>
+            </a:r>
+          </a:p>
+        </p:txBody>
+      </p:sp>
+      <p:sp>
+        <p:nvSpPr>
+          <p:cNvPr id="3" name="텍스트"/>
           <p:cNvSpPr txBox="1"/>
           <p:nvPr/>
         </p:nvSpPr>
         <p:spPr>
           <a:xfrm>
-            <a:off x="216000" y="525600"/>
-            <a:ext cx="2160000" cy="122400"/>
+            <a:off x="252000" y="223200"/>
+            <a:ext cx="1440000" cy="133351"/>
           </a:xfrm>
           <a:prstGeom prst="rect">
             <a:avLst/>
@@ -3364,32 +3161,32 @@
           <a:p>
             <a:pPr algn="l">
               <a:lnSpc>
-                <a:spcPts val="1232"/>
+                <a:spcPts val="1015"/>
               </a:lnSpc>
             </a:pPr>
             <a:r>
-              <a:rPr sz="850" b="1">
+              <a:rPr sz="700" b="1" spc="200">
                 <a:solidFill>
-                  <a:srgbClr val="7D4531"/>
+                  <a:srgbClr val="A3A9B5"/>
                 </a:solidFill>
                 <a:latin typeface="맑은 고딕"/>
                 <a:ea typeface="맑은 고딕"/>
               </a:rPr>
-              <a:t>데이터 분석가</a:t>
-            </a:r>
-          </a:p>
-        </p:txBody>
-      </p:sp>
-      <p:sp>
-        <p:nvSpPr>
-          <p:cNvPr id="11" name="텍스트"/>
+              <a:t>소속 · 브랜드</a:t>
+            </a:r>
+          </a:p>
+        </p:txBody>
+      </p:sp>
+      <p:sp>
+        <p:nvSpPr>
+          <p:cNvPr id="4" name="텍스트"/>
           <p:cNvSpPr txBox="1"/>
           <p:nvPr/>
         </p:nvSpPr>
         <p:spPr>
           <a:xfrm>
-            <a:off x="216000" y="770400"/>
-            <a:ext cx="2160000" cy="100800"/>
+            <a:off x="252000" y="604800"/>
+            <a:ext cx="1656000" cy="360000"/>
           </a:xfrm>
           <a:prstGeom prst="rect">
             <a:avLst/>
@@ -3404,32 +3201,32 @@
           <a:p>
             <a:pPr algn="l">
               <a:lnSpc>
-                <a:spcPts val="1087"/>
+                <a:spcPts val="3190"/>
               </a:lnSpc>
             </a:pPr>
             <a:r>
-              <a:rPr sz="750" b="1" spc="150">
+              <a:rPr sz="2200" b="1">
                 <a:solidFill>
-                  <a:srgbClr val="7E6A63"/>
+                  <a:srgbClr val="FFFFFF"/>
                 </a:solidFill>
                 <a:latin typeface="맑은 고딕"/>
                 <a:ea typeface="맑은 고딕"/>
               </a:rPr>
-              <a:t>소속 · 브랜드</a:t>
-            </a:r>
-          </a:p>
-        </p:txBody>
-      </p:sp>
-      <p:sp>
-        <p:nvSpPr>
-          <p:cNvPr id="12" name="텍스트"/>
+              <a:t>황주원</a:t>
+            </a:r>
+          </a:p>
+        </p:txBody>
+      </p:sp>
+      <p:sp>
+        <p:nvSpPr>
+          <p:cNvPr id="5" name="텍스트"/>
           <p:cNvSpPr txBox="1"/>
           <p:nvPr/>
         </p:nvSpPr>
         <p:spPr>
           <a:xfrm>
-            <a:off x="216000" y="1432800"/>
-            <a:ext cx="122400" cy="108000"/>
+            <a:off x="252000" y="1008000"/>
+            <a:ext cx="1656000" cy="171451"/>
           </a:xfrm>
           <a:prstGeom prst="rect">
             <a:avLst/>
@@ -3444,32 +3241,61 @@
           <a:p>
             <a:pPr algn="l">
               <a:lnSpc>
-                <a:spcPts val="1015"/>
+                <a:spcPts val="1305"/>
               </a:lnSpc>
             </a:pPr>
             <a:r>
-              <a:rPr sz="700" b="1">
+              <a:rPr sz="900" b="0">
                 <a:solidFill>
-                  <a:srgbClr val="FFFFFF"/>
+                  <a:srgbClr val="A3A9B5"/>
                 </a:solidFill>
                 <a:latin typeface="맑은 고딕"/>
                 <a:ea typeface="맑은 고딕"/>
               </a:rPr>
-              <a:t>T</a:t>
-            </a:r>
-          </a:p>
-        </p:txBody>
-      </p:sp>
-      <p:sp>
-        <p:nvSpPr>
-          <p:cNvPr id="13" name="텍스트"/>
+              <a:t>데이터 분석가</a:t>
+            </a:r>
+          </a:p>
+        </p:txBody>
+      </p:sp>
+      <p:sp>
+        <p:nvSpPr>
+          <p:cNvPr id="6" name="Rectangle 5"/>
+          <p:cNvSpPr/>
+          <p:nvPr/>
+        </p:nvSpPr>
+        <p:spPr>
+          <a:xfrm>
+            <a:off x="252000" y="1231200"/>
+            <a:ext cx="144000" cy="18000"/>
+          </a:xfrm>
+          <a:prstGeom prst="rect">
+            <a:avLst/>
+          </a:prstGeom>
+          <a:solidFill>
+            <a:srgbClr val="9B7BFF"/>
+          </a:solidFill>
+          <a:ln>
+            <a:noFill/>
+          </a:ln>
+        </p:spPr>
+        <p:txBody>
+          <a:bodyPr rtlCol="0" anchor="ctr"/>
+          <a:lstStyle/>
+          <a:p>
+            <a:pPr algn="ctr"/>
+          </a:p>
+        </p:txBody>
+      </p:sp>
+      <p:sp>
+        <p:nvSpPr>
+          <p:cNvPr id="7" name="텍스트"/>
           <p:cNvSpPr txBox="1"/>
           <p:nvPr/>
         </p:nvSpPr>
         <p:spPr>
           <a:xfrm>
-            <a:off x="360000" y="1432800"/>
-            <a:ext cx="1368000" cy="108000"/>
+            <a:off x="252000" y="1350000"/>
+            <a:ext cx="331200" cy="99061"/>
           </a:xfrm>
           <a:prstGeom prst="rect">
             <a:avLst/>
@@ -3484,11 +3310,51 @@
           <a:p>
             <a:pPr algn="l">
               <a:lnSpc>
-                <a:spcPts val="1015"/>
+                <a:spcPts val="754"/>
               </a:lnSpc>
             </a:pPr>
             <a:r>
-              <a:rPr sz="700" b="0">
+              <a:rPr sz="520" b="1" spc="120">
+                <a:solidFill>
+                  <a:srgbClr val="A3A9B5"/>
+                </a:solidFill>
+                <a:latin typeface="맑은 고딕"/>
+                <a:ea typeface="맑은 고딕"/>
+              </a:rPr>
+              <a:t>TEL</a:t>
+            </a:r>
+          </a:p>
+        </p:txBody>
+      </p:sp>
+      <p:sp>
+        <p:nvSpPr>
+          <p:cNvPr id="8" name="텍스트"/>
+          <p:cNvSpPr txBox="1"/>
+          <p:nvPr/>
+        </p:nvSpPr>
+        <p:spPr>
+          <a:xfrm>
+            <a:off x="583200" y="1339200"/>
+            <a:ext cx="1296000" cy="129541"/>
+          </a:xfrm>
+          <a:prstGeom prst="rect">
+            <a:avLst/>
+          </a:prstGeom>
+          <a:noFill/>
+        </p:spPr>
+        <p:txBody>
+          <a:bodyPr wrap="square" lIns="0" rIns="0" tIns="0" bIns="0" anchor="t">
+            <a:spAutoFit/>
+          </a:bodyPr>
+          <a:lstStyle/>
+          <a:p>
+            <a:pPr algn="l">
+              <a:lnSpc>
+                <a:spcPts val="986"/>
+              </a:lnSpc>
+            </a:pPr>
+            <a:r>
+              <a:rPr sz="680" b="0">
                 <a:solidFill>
                   <a:srgbClr val="FFFFFF"/>
                 </a:solidFill>
@@ -3502,14 +3368,14 @@
       </p:sp>
       <p:sp>
         <p:nvSpPr>
-          <p:cNvPr id="14" name="텍스트"/>
+          <p:cNvPr id="9" name="텍스트"/>
           <p:cNvSpPr txBox="1"/>
           <p:nvPr/>
         </p:nvSpPr>
         <p:spPr>
           <a:xfrm>
-            <a:off x="216000" y="1576800"/>
-            <a:ext cx="122400" cy="108000"/>
+            <a:off x="252000" y="1472400"/>
+            <a:ext cx="331200" cy="99061"/>
           </a:xfrm>
           <a:prstGeom prst="rect">
             <a:avLst/>
@@ -3524,32 +3390,32 @@
           <a:p>
             <a:pPr algn="l">
               <a:lnSpc>
-                <a:spcPts val="1015"/>
+                <a:spcPts val="754"/>
               </a:lnSpc>
             </a:pPr>
             <a:r>
-              <a:rPr sz="700" b="1">
+              <a:rPr sz="520" b="1" spc="120">
                 <a:solidFill>
-                  <a:srgbClr val="FFFFFF"/>
+                  <a:srgbClr val="A3A9B5"/>
                 </a:solidFill>
                 <a:latin typeface="맑은 고딕"/>
                 <a:ea typeface="맑은 고딕"/>
               </a:rPr>
-              <a:t>E</a:t>
-            </a:r>
-          </a:p>
-        </p:txBody>
-      </p:sp>
-      <p:sp>
-        <p:nvSpPr>
-          <p:cNvPr id="15" name="텍스트"/>
+              <a:t>MAIL</a:t>
+            </a:r>
+          </a:p>
+        </p:txBody>
+      </p:sp>
+      <p:sp>
+        <p:nvSpPr>
+          <p:cNvPr id="10" name="텍스트"/>
           <p:cNvSpPr txBox="1"/>
           <p:nvPr/>
         </p:nvSpPr>
         <p:spPr>
           <a:xfrm>
-            <a:off x="360000" y="1576800"/>
-            <a:ext cx="1368000" cy="108000"/>
+            <a:off x="583200" y="1461600"/>
+            <a:ext cx="1296000" cy="129541"/>
           </a:xfrm>
           <a:prstGeom prst="rect">
             <a:avLst/>
@@ -3564,11 +3430,11 @@
           <a:p>
             <a:pPr algn="l">
               <a:lnSpc>
-                <a:spcPts val="1015"/>
+                <a:spcPts val="986"/>
               </a:lnSpc>
             </a:pPr>
             <a:r>
-              <a:rPr sz="700" b="0">
+              <a:rPr sz="680" b="0">
                 <a:solidFill>
                   <a:srgbClr val="FFFFFF"/>
                 </a:solidFill>
@@ -3582,14 +3448,14 @@
       </p:sp>
       <p:sp>
         <p:nvSpPr>
-          <p:cNvPr id="16" name="텍스트"/>
+          <p:cNvPr id="11" name="텍스트"/>
           <p:cNvSpPr txBox="1"/>
           <p:nvPr/>
         </p:nvSpPr>
         <p:spPr>
           <a:xfrm>
-            <a:off x="1800000" y="1432800"/>
-            <a:ext cx="122400" cy="108000"/>
+            <a:off x="252000" y="1594800"/>
+            <a:ext cx="331200" cy="99061"/>
           </a:xfrm>
           <a:prstGeom prst="rect">
             <a:avLst/>
@@ -3604,32 +3470,32 @@
           <a:p>
             <a:pPr algn="l">
               <a:lnSpc>
-                <a:spcPts val="1015"/>
+                <a:spcPts val="754"/>
               </a:lnSpc>
             </a:pPr>
             <a:r>
-              <a:rPr sz="700" b="1">
+              <a:rPr sz="520" b="1" spc="120">
                 <a:solidFill>
-                  <a:srgbClr val="FFFFFF"/>
+                  <a:srgbClr val="A3A9B5"/>
                 </a:solidFill>
                 <a:latin typeface="맑은 고딕"/>
                 <a:ea typeface="맑은 고딕"/>
               </a:rPr>
-              <a:t>A</a:t>
-            </a:r>
-          </a:p>
-        </p:txBody>
-      </p:sp>
-      <p:sp>
-        <p:nvSpPr>
-          <p:cNvPr id="17" name="텍스트"/>
+              <a:t>ADDR</a:t>
+            </a:r>
+          </a:p>
+        </p:txBody>
+      </p:sp>
+      <p:sp>
+        <p:nvSpPr>
+          <p:cNvPr id="12" name="텍스트"/>
           <p:cNvSpPr txBox="1"/>
           <p:nvPr/>
         </p:nvSpPr>
         <p:spPr>
           <a:xfrm>
-            <a:off x="1944000" y="1432800"/>
-            <a:ext cx="1188000" cy="216000"/>
+            <a:off x="583200" y="1584000"/>
+            <a:ext cx="1296000" cy="129541"/>
           </a:xfrm>
           <a:prstGeom prst="rect">
             <a:avLst/>
@@ -3644,11 +3510,11 @@
           <a:p>
             <a:pPr algn="l">
               <a:lnSpc>
-                <a:spcPts val="1015"/>
+                <a:spcPts val="986"/>
               </a:lnSpc>
             </a:pPr>
             <a:r>
-              <a:rPr sz="700" b="0">
+              <a:rPr sz="680" b="0">
                 <a:solidFill>
                   <a:srgbClr val="FFFFFF"/>
                 </a:solidFill>
@@ -3674,7 +3540,7 @@
     <p:bg>
       <p:bgPr>
         <a:solidFill>
-          <a:srgbClr val="FBF8F2"/>
+          <a:srgbClr val="FFFFFF"/>
         </a:solidFill>
         <a:effectLst/>
       </p:bgPr>
@@ -3688,14 +3554,43 @@
       <p:grpSpPr/>
       <p:sp>
         <p:nvSpPr>
-          <p:cNvPr id="2" name="Freeform 1"/>
+          <p:cNvPr id="2" name="Rectangle 1"/>
           <p:cNvSpPr/>
           <p:nvPr/>
         </p:nvSpPr>
         <p:spPr>
           <a:xfrm>
-            <a:off x="2016000" y="576000"/>
-            <a:ext cx="1224000" cy="1224000"/>
+            <a:off x="0" y="0"/>
+            <a:ext cx="3240000" cy="1800000"/>
+          </a:xfrm>
+          <a:prstGeom prst="rect">
+            <a:avLst/>
+          </a:prstGeom>
+          <a:solidFill>
+            <a:srgbClr val="9B7BFF"/>
+          </a:solidFill>
+          <a:ln>
+            <a:noFill/>
+          </a:ln>
+        </p:spPr>
+        <p:txBody>
+          <a:bodyPr rtlCol="0" anchor="ctr"/>
+          <a:lstStyle/>
+          <a:p>
+            <a:pPr algn="ctr"/>
+          </a:p>
+        </p:txBody>
+      </p:sp>
+      <p:sp>
+        <p:nvSpPr>
+          <p:cNvPr id="3" name="Freeform 2"/>
+          <p:cNvSpPr/>
+          <p:nvPr/>
+        </p:nvSpPr>
+        <p:spPr>
+          <a:xfrm>
+            <a:off x="2412000" y="972000"/>
+            <a:ext cx="828000" cy="828000"/>
           </a:xfrm>
           <a:custGeom>
             <a:avLst/>
@@ -3704,61 +3599,91 @@
             <a:cxnLst/>
             <a:rect l="l" t="t" r="r" b="b"/>
             <a:pathLst>
-              <a:path w="1224000" h="1224000">
+              <a:path w="828000" h="828000">
                 <a:moveTo>
-                  <a:pt x="1224000" y="1224000"/>
+                  <a:pt x="828000" y="828000"/>
                 </a:moveTo>
                 <a:lnTo>
-                  <a:pt x="0" y="1224000"/>
+                  <a:pt x="0" y="828000"/>
                 </a:lnTo>
                 <a:lnTo>
-                  <a:pt x="7696" y="1086955"/>
+                  <a:pt x="1773" y="773846"/>
                 </a:lnTo>
                 <a:lnTo>
-                  <a:pt x="30688" y="951634"/>
+                  <a:pt x="7084" y="719924"/>
                 </a:lnTo>
                 <a:lnTo>
-                  <a:pt x="68687" y="819738"/>
+                  <a:pt x="15910" y="666465"/>
                 </a:lnTo>
                 <a:lnTo>
-                  <a:pt x="121214" y="692926"/>
+                  <a:pt x="28213" y="613698"/>
                 </a:lnTo>
                 <a:lnTo>
-                  <a:pt x="187610" y="572793"/>
+                  <a:pt x="43942" y="561848"/>
                 </a:lnTo>
                 <a:lnTo>
-                  <a:pt x="267038" y="460848"/>
+                  <a:pt x="63028" y="511138"/>
                 </a:lnTo>
                 <a:lnTo>
-                  <a:pt x="358501" y="358501"/>
+                  <a:pt x="85389" y="461785"/>
                 </a:lnTo>
                 <a:lnTo>
-                  <a:pt x="460848" y="267038"/>
+                  <a:pt x="110931" y="414000"/>
                 </a:lnTo>
                 <a:lnTo>
-                  <a:pt x="572793" y="187610"/>
+                  <a:pt x="139543" y="367988"/>
                 </a:lnTo>
                 <a:lnTo>
-                  <a:pt x="692926" y="121214"/>
+                  <a:pt x="171103" y="323946"/>
                 </a:lnTo>
                 <a:lnTo>
-                  <a:pt x="819738" y="68687"/>
+                  <a:pt x="205477" y="282062"/>
                 </a:lnTo>
                 <a:lnTo>
-                  <a:pt x="951634" y="30688"/>
+                  <a:pt x="242516" y="242516"/>
                 </a:lnTo>
                 <a:lnTo>
-                  <a:pt x="1086955" y="7696"/>
+                  <a:pt x="282062" y="205477"/>
                 </a:lnTo>
                 <a:lnTo>
-                  <a:pt x="1224000" y="0"/>
+                  <a:pt x="323946" y="171103"/>
+                </a:lnTo>
+                <a:lnTo>
+                  <a:pt x="367988" y="139543"/>
+                </a:lnTo>
+                <a:lnTo>
+                  <a:pt x="414000" y="110931"/>
+                </a:lnTo>
+                <a:lnTo>
+                  <a:pt x="461785" y="85389"/>
+                </a:lnTo>
+                <a:lnTo>
+                  <a:pt x="511138" y="63028"/>
+                </a:lnTo>
+                <a:lnTo>
+                  <a:pt x="561848" y="43942"/>
+                </a:lnTo>
+                <a:lnTo>
+                  <a:pt x="613698" y="28213"/>
+                </a:lnTo>
+                <a:lnTo>
+                  <a:pt x="666465" y="15910"/>
+                </a:lnTo>
+                <a:lnTo>
+                  <a:pt x="719924" y="7084"/>
+                </a:lnTo>
+                <a:lnTo>
+                  <a:pt x="773846" y="1773"/>
+                </a:lnTo>
+                <a:lnTo>
+                  <a:pt x="828000" y="0"/>
                 </a:lnTo>
                 <a:close/>
               </a:path>
             </a:pathLst>
           </a:custGeom>
           <a:solidFill>
-            <a:srgbClr val="3B917D"/>
+            <a:srgbClr val="B198FF"/>
           </a:solidFill>
           <a:ln>
             <a:noFill/>
@@ -3774,274 +3699,14 @@
       </p:sp>
       <p:sp>
         <p:nvSpPr>
-          <p:cNvPr id="3" name="Freeform 2"/>
-          <p:cNvSpPr/>
+          <p:cNvPr id="4" name="텍스트"/>
+          <p:cNvSpPr txBox="1"/>
           <p:nvPr/>
         </p:nvSpPr>
         <p:spPr>
           <a:xfrm>
-            <a:off x="2520000" y="1080000"/>
-            <a:ext cx="720000" cy="720000"/>
-          </a:xfrm>
-          <a:custGeom>
-            <a:avLst/>
-            <a:gdLst/>
-            <a:ahLst/>
-            <a:cxnLst/>
-            <a:rect l="l" t="t" r="r" b="b"/>
-            <a:pathLst>
-              <a:path w="720000" h="720000">
-                <a:moveTo>
-                  <a:pt x="720000" y="720000"/>
-                </a:moveTo>
-                <a:lnTo>
-                  <a:pt x="0" y="720000"/>
-                </a:lnTo>
-                <a:lnTo>
-                  <a:pt x="4527" y="639386"/>
-                </a:lnTo>
-                <a:lnTo>
-                  <a:pt x="18052" y="559785"/>
-                </a:lnTo>
-                <a:lnTo>
-                  <a:pt x="40404" y="482199"/>
-                </a:lnTo>
-                <a:lnTo>
-                  <a:pt x="71302" y="407604"/>
-                </a:lnTo>
-                <a:lnTo>
-                  <a:pt x="110359" y="336937"/>
-                </a:lnTo>
-                <a:lnTo>
-                  <a:pt x="157081" y="271087"/>
-                </a:lnTo>
-                <a:lnTo>
-                  <a:pt x="210883" y="210883"/>
-                </a:lnTo>
-                <a:lnTo>
-                  <a:pt x="271087" y="157081"/>
-                </a:lnTo>
-                <a:lnTo>
-                  <a:pt x="336937" y="110359"/>
-                </a:lnTo>
-                <a:lnTo>
-                  <a:pt x="407604" y="71302"/>
-                </a:lnTo>
-                <a:lnTo>
-                  <a:pt x="482199" y="40404"/>
-                </a:lnTo>
-                <a:lnTo>
-                  <a:pt x="559785" y="18052"/>
-                </a:lnTo>
-                <a:lnTo>
-                  <a:pt x="639386" y="4527"/>
-                </a:lnTo>
-                <a:lnTo>
-                  <a:pt x="720000" y="0"/>
-                </a:lnTo>
-                <a:close/>
-              </a:path>
-            </a:pathLst>
-          </a:custGeom>
-          <a:solidFill>
-            <a:srgbClr val="C8E0DB"/>
-          </a:solidFill>
-          <a:ln>
-            <a:noFill/>
-          </a:ln>
-        </p:spPr>
-        <p:txBody>
-          <a:bodyPr rtlCol="0" anchor="ctr"/>
-          <a:lstStyle/>
-          <a:p>
-            <a:pPr algn="ctr"/>
-          </a:p>
-        </p:txBody>
-      </p:sp>
-      <p:sp>
-        <p:nvSpPr>
-          <p:cNvPr id="4" name="Rectangle 3"/>
-          <p:cNvSpPr/>
-          <p:nvPr/>
-        </p:nvSpPr>
-        <p:spPr>
-          <a:xfrm>
-            <a:off x="2859840" y="1360080"/>
-            <a:ext cx="40320" cy="231840"/>
-          </a:xfrm>
-          <a:prstGeom prst="rect">
-            <a:avLst/>
-          </a:prstGeom>
-          <a:solidFill>
-            <a:srgbClr val="FFFFFF"/>
-          </a:solidFill>
-          <a:ln>
-            <a:noFill/>
-          </a:ln>
-        </p:spPr>
-        <p:txBody>
-          <a:bodyPr rtlCol="0" anchor="ctr"/>
-          <a:lstStyle/>
-          <a:p>
-            <a:pPr algn="ctr"/>
-          </a:p>
-        </p:txBody>
-      </p:sp>
-      <p:sp>
-        <p:nvSpPr>
-          <p:cNvPr id="5" name="Rectangle 4"/>
-          <p:cNvSpPr/>
-          <p:nvPr/>
-        </p:nvSpPr>
-        <p:spPr>
-          <a:xfrm rot="2700000">
-            <a:off x="2859840" y="1360080"/>
-            <a:ext cx="40320" cy="231840"/>
-          </a:xfrm>
-          <a:prstGeom prst="rect">
-            <a:avLst/>
-          </a:prstGeom>
-          <a:solidFill>
-            <a:srgbClr val="FFFFFF"/>
-          </a:solidFill>
-          <a:ln>
-            <a:noFill/>
-          </a:ln>
-        </p:spPr>
-        <p:txBody>
-          <a:bodyPr rtlCol="0" anchor="ctr"/>
-          <a:lstStyle/>
-          <a:p>
-            <a:pPr algn="ctr"/>
-          </a:p>
-        </p:txBody>
-      </p:sp>
-      <p:sp>
-        <p:nvSpPr>
-          <p:cNvPr id="6" name="Rectangle 5"/>
-          <p:cNvSpPr/>
-          <p:nvPr/>
-        </p:nvSpPr>
-        <p:spPr>
-          <a:xfrm rot="5400000">
-            <a:off x="2859840" y="1360080"/>
-            <a:ext cx="40320" cy="231840"/>
-          </a:xfrm>
-          <a:prstGeom prst="rect">
-            <a:avLst/>
-          </a:prstGeom>
-          <a:solidFill>
-            <a:srgbClr val="FFFFFF"/>
-          </a:solidFill>
-          <a:ln>
-            <a:noFill/>
-          </a:ln>
-        </p:spPr>
-        <p:txBody>
-          <a:bodyPr rtlCol="0" anchor="ctr"/>
-          <a:lstStyle/>
-          <a:p>
-            <a:pPr algn="ctr"/>
-          </a:p>
-        </p:txBody>
-      </p:sp>
-      <p:sp>
-        <p:nvSpPr>
-          <p:cNvPr id="7" name="Rectangle 6"/>
-          <p:cNvSpPr/>
-          <p:nvPr/>
-        </p:nvSpPr>
-        <p:spPr>
-          <a:xfrm rot="8100000">
-            <a:off x="2859840" y="1360080"/>
-            <a:ext cx="40320" cy="231840"/>
-          </a:xfrm>
-          <a:prstGeom prst="rect">
-            <a:avLst/>
-          </a:prstGeom>
-          <a:solidFill>
-            <a:srgbClr val="FFFFFF"/>
-          </a:solidFill>
-          <a:ln>
-            <a:noFill/>
-          </a:ln>
-        </p:spPr>
-        <p:txBody>
-          <a:bodyPr rtlCol="0" anchor="ctr"/>
-          <a:lstStyle/>
-          <a:p>
-            <a:pPr algn="ctr"/>
-          </a:p>
-        </p:txBody>
-      </p:sp>
-      <p:sp>
-        <p:nvSpPr>
-          <p:cNvPr id="8" name="Oval 7"/>
-          <p:cNvSpPr/>
-          <p:nvPr/>
-        </p:nvSpPr>
-        <p:spPr>
-          <a:xfrm>
-            <a:off x="2809440" y="1405440"/>
-            <a:ext cx="141120" cy="141120"/>
-          </a:xfrm>
-          <a:prstGeom prst="ellipse">
-            <a:avLst/>
-          </a:prstGeom>
-          <a:solidFill>
-            <a:srgbClr val="FFFFFF"/>
-          </a:solidFill>
-          <a:ln>
-            <a:noFill/>
-          </a:ln>
-        </p:spPr>
-        <p:txBody>
-          <a:bodyPr rtlCol="0" anchor="ctr"/>
-          <a:lstStyle/>
-          <a:p>
-            <a:pPr algn="ctr"/>
-          </a:p>
-        </p:txBody>
-      </p:sp>
-      <p:sp>
-        <p:nvSpPr>
-          <p:cNvPr id="9" name="Oval 8"/>
-          <p:cNvSpPr/>
-          <p:nvPr/>
-        </p:nvSpPr>
-        <p:spPr>
-          <a:xfrm>
-            <a:off x="2849760" y="1445760"/>
-            <a:ext cx="60480" cy="60480"/>
-          </a:xfrm>
-          <a:prstGeom prst="ellipse">
-            <a:avLst/>
-          </a:prstGeom>
-          <a:solidFill>
-            <a:srgbClr val="737373"/>
-          </a:solidFill>
-          <a:ln>
-            <a:noFill/>
-          </a:ln>
-        </p:spPr>
-        <p:txBody>
-          <a:bodyPr rtlCol="0" anchor="ctr"/>
-          <a:lstStyle/>
-          <a:p>
-            <a:pPr algn="ctr"/>
-          </a:p>
-        </p:txBody>
-      </p:sp>
-      <p:sp>
-        <p:nvSpPr>
-          <p:cNvPr id="10" name="텍스트"/>
-          <p:cNvSpPr txBox="1"/>
-          <p:nvPr/>
-        </p:nvSpPr>
-        <p:spPr>
-          <a:xfrm>
-            <a:off x="252000" y="324000"/>
-            <a:ext cx="1944000" cy="720000"/>
+            <a:off x="252000" y="432000"/>
+            <a:ext cx="2304000" cy="720000"/>
           </a:xfrm>
           <a:prstGeom prst="rect">
             <a:avLst/>
@@ -4056,16 +3721,16 @@
           <a:p>
             <a:pPr algn="l">
               <a:lnSpc>
-                <a:spcPts val="1739"/>
+                <a:spcPts val="1884"/>
               </a:lnSpc>
             </a:pPr>
             <a:r>
-              <a:rPr sz="1200" b="1">
+              <a:rPr sz="1300" b="1">
                 <a:solidFill>
-                  <a:srgbClr val="3B2017"/>
+                  <a:srgbClr val="12151C"/>
                 </a:solidFill>
-                <a:latin typeface="바탕"/>
-                <a:ea typeface="바탕"/>
+                <a:latin typeface="맑은 고딕"/>
+                <a:ea typeface="맑은 고딕"/>
               </a:rPr>
               <a:t>자유롭게 일하되</a:t>
             </a:r>
@@ -4073,16 +3738,16 @@
           <a:p>
             <a:pPr algn="l">
               <a:lnSpc>
-                <a:spcPts val="1739"/>
+                <a:spcPts val="1884"/>
               </a:lnSpc>
             </a:pPr>
             <a:r>
-              <a:rPr sz="1200" b="1">
+              <a:rPr sz="1300" b="1">
                 <a:solidFill>
-                  <a:srgbClr val="3B2017"/>
+                  <a:srgbClr val="12151C"/>
                 </a:solidFill>
-                <a:latin typeface="바탕"/>
-                <a:ea typeface="바탕"/>
+                <a:latin typeface="맑은 고딕"/>
+                <a:ea typeface="맑은 고딕"/>
               </a:rPr>
               <a:t>책임은 무겁게</a:t>
             </a:r>
@@ -4091,14 +3756,14 @@
       </p:sp>
       <p:sp>
         <p:nvSpPr>
-          <p:cNvPr id="11" name="텍스트"/>
+          <p:cNvPr id="5" name="텍스트"/>
           <p:cNvSpPr txBox="1"/>
           <p:nvPr/>
         </p:nvSpPr>
         <p:spPr>
           <a:xfrm>
             <a:off x="252000" y="1476000"/>
-            <a:ext cx="1440000" cy="108000"/>
+            <a:ext cx="1800000" cy="133351"/>
           </a:xfrm>
           <a:prstGeom prst="rect">
             <a:avLst/>
@@ -4113,13 +3778,13 @@
           <a:p>
             <a:pPr algn="l">
               <a:lnSpc>
-                <a:spcPts val="1087"/>
+                <a:spcPts val="1015"/>
               </a:lnSpc>
             </a:pPr>
             <a:r>
-              <a:rPr sz="750" b="1" spc="200">
+              <a:rPr sz="700" b="1" spc="200">
                 <a:solidFill>
-                  <a:srgbClr val="7E6C64"/>
+                  <a:srgbClr val="12151C"/>
                 </a:solidFill>
                 <a:latin typeface="맑은 고딕"/>
                 <a:ea typeface="맑은 고딕"/>

--- a/public/fun/cards/expert/expert-16.pptx
+++ b/public/fun/cards/expert/expert-16.pptx
@@ -3099,54 +3099,673 @@
       <p:grpSpPr/>
       <p:sp>
         <p:nvSpPr>
-          <p:cNvPr id="2" name="텍스트"/>
+          <p:cNvPr id="2" name="Rectangle 1"/>
+          <p:cNvSpPr/>
+          <p:nvPr/>
+        </p:nvSpPr>
+        <p:spPr>
+          <a:xfrm>
+            <a:off x="2016000" y="0"/>
+            <a:ext cx="1224000" cy="756000"/>
+          </a:xfrm>
+          <a:prstGeom prst="rect">
+            <a:avLst/>
+          </a:prstGeom>
+          <a:solidFill>
+            <a:srgbClr val="9B7BFF"/>
+          </a:solidFill>
+          <a:ln>
+            <a:noFill/>
+          </a:ln>
+        </p:spPr>
+        <p:txBody>
+          <a:bodyPr rtlCol="0" anchor="ctr"/>
+          <a:lstStyle/>
+          <a:p>
+            <a:pPr algn="ctr"/>
+          </a:p>
+        </p:txBody>
+      </p:sp>
+      <p:cxnSp>
+        <p:nvCxnSpPr>
+          <p:cNvPr id="3" name="Connector 2"/>
+          <p:cNvCxnSpPr/>
+          <p:nvPr/>
+        </p:nvCxnSpPr>
+        <p:spPr>
+          <a:xfrm flipV="1">
+            <a:off x="2016000" y="0"/>
+            <a:ext cx="64800" cy="64800"/>
+          </a:xfrm>
+          <a:prstGeom prst="line">
+            <a:avLst/>
+          </a:prstGeom>
+          <a:ln w="3600">
+            <a:solidFill>
+              <a:srgbClr val="12151C"/>
+            </a:solidFill>
+          </a:ln>
+        </p:spPr>
+      </p:cxnSp>
+      <p:cxnSp>
+        <p:nvCxnSpPr>
+          <p:cNvPr id="4" name="Connector 3"/>
+          <p:cNvCxnSpPr/>
+          <p:nvPr/>
+        </p:nvCxnSpPr>
+        <p:spPr>
+          <a:xfrm flipV="1">
+            <a:off x="2016000" y="0"/>
+            <a:ext cx="129600" cy="129600"/>
+          </a:xfrm>
+          <a:prstGeom prst="line">
+            <a:avLst/>
+          </a:prstGeom>
+          <a:ln w="3600">
+            <a:solidFill>
+              <a:srgbClr val="12151C"/>
+            </a:solidFill>
+          </a:ln>
+        </p:spPr>
+      </p:cxnSp>
+      <p:cxnSp>
+        <p:nvCxnSpPr>
+          <p:cNvPr id="5" name="Connector 4"/>
+          <p:cNvCxnSpPr/>
+          <p:nvPr/>
+        </p:nvCxnSpPr>
+        <p:spPr>
+          <a:xfrm flipV="1">
+            <a:off x="2016000" y="0"/>
+            <a:ext cx="194400" cy="194400"/>
+          </a:xfrm>
+          <a:prstGeom prst="line">
+            <a:avLst/>
+          </a:prstGeom>
+          <a:ln w="3600">
+            <a:solidFill>
+              <a:srgbClr val="12151C"/>
+            </a:solidFill>
+          </a:ln>
+        </p:spPr>
+      </p:cxnSp>
+      <p:cxnSp>
+        <p:nvCxnSpPr>
+          <p:cNvPr id="6" name="Connector 5"/>
+          <p:cNvCxnSpPr/>
+          <p:nvPr/>
+        </p:nvCxnSpPr>
+        <p:spPr>
+          <a:xfrm flipV="1">
+            <a:off x="2016000" y="0"/>
+            <a:ext cx="259200" cy="259200"/>
+          </a:xfrm>
+          <a:prstGeom prst="line">
+            <a:avLst/>
+          </a:prstGeom>
+          <a:ln w="3600">
+            <a:solidFill>
+              <a:srgbClr val="12151C"/>
+            </a:solidFill>
+          </a:ln>
+        </p:spPr>
+      </p:cxnSp>
+      <p:cxnSp>
+        <p:nvCxnSpPr>
+          <p:cNvPr id="7" name="Connector 6"/>
+          <p:cNvCxnSpPr/>
+          <p:nvPr/>
+        </p:nvCxnSpPr>
+        <p:spPr>
+          <a:xfrm flipV="1">
+            <a:off x="2016000" y="0"/>
+            <a:ext cx="324000" cy="324000"/>
+          </a:xfrm>
+          <a:prstGeom prst="line">
+            <a:avLst/>
+          </a:prstGeom>
+          <a:ln w="3600">
+            <a:solidFill>
+              <a:srgbClr val="12151C"/>
+            </a:solidFill>
+          </a:ln>
+        </p:spPr>
+      </p:cxnSp>
+      <p:cxnSp>
+        <p:nvCxnSpPr>
+          <p:cNvPr id="8" name="Connector 7"/>
+          <p:cNvCxnSpPr/>
+          <p:nvPr/>
+        </p:nvCxnSpPr>
+        <p:spPr>
+          <a:xfrm flipV="1">
+            <a:off x="2016000" y="0"/>
+            <a:ext cx="388800" cy="388800"/>
+          </a:xfrm>
+          <a:prstGeom prst="line">
+            <a:avLst/>
+          </a:prstGeom>
+          <a:ln w="3600">
+            <a:solidFill>
+              <a:srgbClr val="12151C"/>
+            </a:solidFill>
+          </a:ln>
+        </p:spPr>
+      </p:cxnSp>
+      <p:cxnSp>
+        <p:nvCxnSpPr>
+          <p:cNvPr id="9" name="Connector 8"/>
+          <p:cNvCxnSpPr/>
+          <p:nvPr/>
+        </p:nvCxnSpPr>
+        <p:spPr>
+          <a:xfrm flipV="1">
+            <a:off x="2016000" y="0"/>
+            <a:ext cx="453600" cy="453600"/>
+          </a:xfrm>
+          <a:prstGeom prst="line">
+            <a:avLst/>
+          </a:prstGeom>
+          <a:ln w="3600">
+            <a:solidFill>
+              <a:srgbClr val="12151C"/>
+            </a:solidFill>
+          </a:ln>
+        </p:spPr>
+      </p:cxnSp>
+      <p:cxnSp>
+        <p:nvCxnSpPr>
+          <p:cNvPr id="10" name="Connector 9"/>
+          <p:cNvCxnSpPr/>
+          <p:nvPr/>
+        </p:nvCxnSpPr>
+        <p:spPr>
+          <a:xfrm flipV="1">
+            <a:off x="2016000" y="0"/>
+            <a:ext cx="518400" cy="518400"/>
+          </a:xfrm>
+          <a:prstGeom prst="line">
+            <a:avLst/>
+          </a:prstGeom>
+          <a:ln w="3600">
+            <a:solidFill>
+              <a:srgbClr val="12151C"/>
+            </a:solidFill>
+          </a:ln>
+        </p:spPr>
+      </p:cxnSp>
+      <p:cxnSp>
+        <p:nvCxnSpPr>
+          <p:cNvPr id="11" name="Connector 10"/>
+          <p:cNvCxnSpPr/>
+          <p:nvPr/>
+        </p:nvCxnSpPr>
+        <p:spPr>
+          <a:xfrm flipV="1">
+            <a:off x="2016000" y="0"/>
+            <a:ext cx="583200" cy="583200"/>
+          </a:xfrm>
+          <a:prstGeom prst="line">
+            <a:avLst/>
+          </a:prstGeom>
+          <a:ln w="3600">
+            <a:solidFill>
+              <a:srgbClr val="12151C"/>
+            </a:solidFill>
+          </a:ln>
+        </p:spPr>
+      </p:cxnSp>
+      <p:cxnSp>
+        <p:nvCxnSpPr>
+          <p:cNvPr id="12" name="Connector 11"/>
+          <p:cNvCxnSpPr/>
+          <p:nvPr/>
+        </p:nvCxnSpPr>
+        <p:spPr>
+          <a:xfrm flipV="1">
+            <a:off x="2016000" y="0"/>
+            <a:ext cx="648000" cy="648000"/>
+          </a:xfrm>
+          <a:prstGeom prst="line">
+            <a:avLst/>
+          </a:prstGeom>
+          <a:ln w="3600">
+            <a:solidFill>
+              <a:srgbClr val="12151C"/>
+            </a:solidFill>
+          </a:ln>
+        </p:spPr>
+      </p:cxnSp>
+      <p:cxnSp>
+        <p:nvCxnSpPr>
+          <p:cNvPr id="13" name="Connector 12"/>
+          <p:cNvCxnSpPr/>
+          <p:nvPr/>
+        </p:nvCxnSpPr>
+        <p:spPr>
+          <a:xfrm flipV="1">
+            <a:off x="2016000" y="0"/>
+            <a:ext cx="712800" cy="712800"/>
+          </a:xfrm>
+          <a:prstGeom prst="line">
+            <a:avLst/>
+          </a:prstGeom>
+          <a:ln w="3600">
+            <a:solidFill>
+              <a:srgbClr val="12151C"/>
+            </a:solidFill>
+          </a:ln>
+        </p:spPr>
+      </p:cxnSp>
+      <p:cxnSp>
+        <p:nvCxnSpPr>
+          <p:cNvPr id="14" name="Connector 13"/>
+          <p:cNvCxnSpPr/>
+          <p:nvPr/>
+        </p:nvCxnSpPr>
+        <p:spPr>
+          <a:xfrm flipV="1">
+            <a:off x="2037600" y="0"/>
+            <a:ext cx="756000" cy="756000"/>
+          </a:xfrm>
+          <a:prstGeom prst="line">
+            <a:avLst/>
+          </a:prstGeom>
+          <a:ln w="3600">
+            <a:solidFill>
+              <a:srgbClr val="12151C"/>
+            </a:solidFill>
+          </a:ln>
+        </p:spPr>
+      </p:cxnSp>
+      <p:cxnSp>
+        <p:nvCxnSpPr>
+          <p:cNvPr id="15" name="Connector 14"/>
+          <p:cNvCxnSpPr/>
+          <p:nvPr/>
+        </p:nvCxnSpPr>
+        <p:spPr>
+          <a:xfrm flipV="1">
+            <a:off x="2102400" y="0"/>
+            <a:ext cx="756000" cy="756000"/>
+          </a:xfrm>
+          <a:prstGeom prst="line">
+            <a:avLst/>
+          </a:prstGeom>
+          <a:ln w="3600">
+            <a:solidFill>
+              <a:srgbClr val="12151C"/>
+            </a:solidFill>
+          </a:ln>
+        </p:spPr>
+      </p:cxnSp>
+      <p:cxnSp>
+        <p:nvCxnSpPr>
+          <p:cNvPr id="16" name="Connector 15"/>
+          <p:cNvCxnSpPr/>
+          <p:nvPr/>
+        </p:nvCxnSpPr>
+        <p:spPr>
+          <a:xfrm flipV="1">
+            <a:off x="2167200" y="0"/>
+            <a:ext cx="756000" cy="756000"/>
+          </a:xfrm>
+          <a:prstGeom prst="line">
+            <a:avLst/>
+          </a:prstGeom>
+          <a:ln w="3600">
+            <a:solidFill>
+              <a:srgbClr val="12151C"/>
+            </a:solidFill>
+          </a:ln>
+        </p:spPr>
+      </p:cxnSp>
+      <p:cxnSp>
+        <p:nvCxnSpPr>
+          <p:cNvPr id="17" name="Connector 16"/>
+          <p:cNvCxnSpPr/>
+          <p:nvPr/>
+        </p:nvCxnSpPr>
+        <p:spPr>
+          <a:xfrm flipV="1">
+            <a:off x="2232000" y="0"/>
+            <a:ext cx="756000" cy="756000"/>
+          </a:xfrm>
+          <a:prstGeom prst="line">
+            <a:avLst/>
+          </a:prstGeom>
+          <a:ln w="3600">
+            <a:solidFill>
+              <a:srgbClr val="12151C"/>
+            </a:solidFill>
+          </a:ln>
+        </p:spPr>
+      </p:cxnSp>
+      <p:cxnSp>
+        <p:nvCxnSpPr>
+          <p:cNvPr id="18" name="Connector 17"/>
+          <p:cNvCxnSpPr/>
+          <p:nvPr/>
+        </p:nvCxnSpPr>
+        <p:spPr>
+          <a:xfrm flipV="1">
+            <a:off x="2296800" y="0"/>
+            <a:ext cx="756000" cy="756000"/>
+          </a:xfrm>
+          <a:prstGeom prst="line">
+            <a:avLst/>
+          </a:prstGeom>
+          <a:ln w="3600">
+            <a:solidFill>
+              <a:srgbClr val="12151C"/>
+            </a:solidFill>
+          </a:ln>
+        </p:spPr>
+      </p:cxnSp>
+      <p:cxnSp>
+        <p:nvCxnSpPr>
+          <p:cNvPr id="19" name="Connector 18"/>
+          <p:cNvCxnSpPr/>
+          <p:nvPr/>
+        </p:nvCxnSpPr>
+        <p:spPr>
+          <a:xfrm flipV="1">
+            <a:off x="2361600" y="0"/>
+            <a:ext cx="756000" cy="756000"/>
+          </a:xfrm>
+          <a:prstGeom prst="line">
+            <a:avLst/>
+          </a:prstGeom>
+          <a:ln w="3600">
+            <a:solidFill>
+              <a:srgbClr val="12151C"/>
+            </a:solidFill>
+          </a:ln>
+        </p:spPr>
+      </p:cxnSp>
+      <p:cxnSp>
+        <p:nvCxnSpPr>
+          <p:cNvPr id="20" name="Connector 19"/>
+          <p:cNvCxnSpPr/>
+          <p:nvPr/>
+        </p:nvCxnSpPr>
+        <p:spPr>
+          <a:xfrm flipV="1">
+            <a:off x="2426400" y="0"/>
+            <a:ext cx="756000" cy="756000"/>
+          </a:xfrm>
+          <a:prstGeom prst="line">
+            <a:avLst/>
+          </a:prstGeom>
+          <a:ln w="3600">
+            <a:solidFill>
+              <a:srgbClr val="12151C"/>
+            </a:solidFill>
+          </a:ln>
+        </p:spPr>
+      </p:cxnSp>
+      <p:cxnSp>
+        <p:nvCxnSpPr>
+          <p:cNvPr id="21" name="Connector 20"/>
+          <p:cNvCxnSpPr/>
+          <p:nvPr/>
+        </p:nvCxnSpPr>
+        <p:spPr>
+          <a:xfrm flipV="1">
+            <a:off x="2491200" y="7200"/>
+            <a:ext cx="748800" cy="748800"/>
+          </a:xfrm>
+          <a:prstGeom prst="line">
+            <a:avLst/>
+          </a:prstGeom>
+          <a:ln w="3600">
+            <a:solidFill>
+              <a:srgbClr val="12151C"/>
+            </a:solidFill>
+          </a:ln>
+        </p:spPr>
+      </p:cxnSp>
+      <p:cxnSp>
+        <p:nvCxnSpPr>
+          <p:cNvPr id="22" name="Connector 21"/>
+          <p:cNvCxnSpPr/>
+          <p:nvPr/>
+        </p:nvCxnSpPr>
+        <p:spPr>
+          <a:xfrm flipV="1">
+            <a:off x="2556000" y="72000"/>
+            <a:ext cx="684000" cy="684000"/>
+          </a:xfrm>
+          <a:prstGeom prst="line">
+            <a:avLst/>
+          </a:prstGeom>
+          <a:ln w="3600">
+            <a:solidFill>
+              <a:srgbClr val="12151C"/>
+            </a:solidFill>
+          </a:ln>
+        </p:spPr>
+      </p:cxnSp>
+      <p:cxnSp>
+        <p:nvCxnSpPr>
+          <p:cNvPr id="23" name="Connector 22"/>
+          <p:cNvCxnSpPr/>
+          <p:nvPr/>
+        </p:nvCxnSpPr>
+        <p:spPr>
+          <a:xfrm flipV="1">
+            <a:off x="2620800" y="136800"/>
+            <a:ext cx="619200" cy="619200"/>
+          </a:xfrm>
+          <a:prstGeom prst="line">
+            <a:avLst/>
+          </a:prstGeom>
+          <a:ln w="3600">
+            <a:solidFill>
+              <a:srgbClr val="12151C"/>
+            </a:solidFill>
+          </a:ln>
+        </p:spPr>
+      </p:cxnSp>
+      <p:cxnSp>
+        <p:nvCxnSpPr>
+          <p:cNvPr id="24" name="Connector 23"/>
+          <p:cNvCxnSpPr/>
+          <p:nvPr/>
+        </p:nvCxnSpPr>
+        <p:spPr>
+          <a:xfrm flipV="1">
+            <a:off x="2685600" y="201600"/>
+            <a:ext cx="554400" cy="554400"/>
+          </a:xfrm>
+          <a:prstGeom prst="line">
+            <a:avLst/>
+          </a:prstGeom>
+          <a:ln w="3600">
+            <a:solidFill>
+              <a:srgbClr val="12151C"/>
+            </a:solidFill>
+          </a:ln>
+        </p:spPr>
+      </p:cxnSp>
+      <p:cxnSp>
+        <p:nvCxnSpPr>
+          <p:cNvPr id="25" name="Connector 24"/>
+          <p:cNvCxnSpPr/>
+          <p:nvPr/>
+        </p:nvCxnSpPr>
+        <p:spPr>
+          <a:xfrm flipV="1">
+            <a:off x="2750400" y="266400"/>
+            <a:ext cx="489600" cy="489600"/>
+          </a:xfrm>
+          <a:prstGeom prst="line">
+            <a:avLst/>
+          </a:prstGeom>
+          <a:ln w="3600">
+            <a:solidFill>
+              <a:srgbClr val="12151C"/>
+            </a:solidFill>
+          </a:ln>
+        </p:spPr>
+      </p:cxnSp>
+      <p:cxnSp>
+        <p:nvCxnSpPr>
+          <p:cNvPr id="26" name="Connector 25"/>
+          <p:cNvCxnSpPr/>
+          <p:nvPr/>
+        </p:nvCxnSpPr>
+        <p:spPr>
+          <a:xfrm flipV="1">
+            <a:off x="2815200" y="331200"/>
+            <a:ext cx="424800" cy="424800"/>
+          </a:xfrm>
+          <a:prstGeom prst="line">
+            <a:avLst/>
+          </a:prstGeom>
+          <a:ln w="3600">
+            <a:solidFill>
+              <a:srgbClr val="12151C"/>
+            </a:solidFill>
+          </a:ln>
+        </p:spPr>
+      </p:cxnSp>
+      <p:cxnSp>
+        <p:nvCxnSpPr>
+          <p:cNvPr id="27" name="Connector 26"/>
+          <p:cNvCxnSpPr/>
+          <p:nvPr/>
+        </p:nvCxnSpPr>
+        <p:spPr>
+          <a:xfrm flipV="1">
+            <a:off x="2880000" y="396000"/>
+            <a:ext cx="360000" cy="360000"/>
+          </a:xfrm>
+          <a:prstGeom prst="line">
+            <a:avLst/>
+          </a:prstGeom>
+          <a:ln w="3600">
+            <a:solidFill>
+              <a:srgbClr val="12151C"/>
+            </a:solidFill>
+          </a:ln>
+        </p:spPr>
+      </p:cxnSp>
+      <p:cxnSp>
+        <p:nvCxnSpPr>
+          <p:cNvPr id="28" name="Connector 27"/>
+          <p:cNvCxnSpPr/>
+          <p:nvPr/>
+        </p:nvCxnSpPr>
+        <p:spPr>
+          <a:xfrm flipV="1">
+            <a:off x="2944800" y="460800"/>
+            <a:ext cx="295200" cy="295200"/>
+          </a:xfrm>
+          <a:prstGeom prst="line">
+            <a:avLst/>
+          </a:prstGeom>
+          <a:ln w="3600">
+            <a:solidFill>
+              <a:srgbClr val="12151C"/>
+            </a:solidFill>
+          </a:ln>
+        </p:spPr>
+      </p:cxnSp>
+      <p:cxnSp>
+        <p:nvCxnSpPr>
+          <p:cNvPr id="29" name="Connector 28"/>
+          <p:cNvCxnSpPr/>
+          <p:nvPr/>
+        </p:nvCxnSpPr>
+        <p:spPr>
+          <a:xfrm flipV="1">
+            <a:off x="3009600" y="525600"/>
+            <a:ext cx="230400" cy="230400"/>
+          </a:xfrm>
+          <a:prstGeom prst="line">
+            <a:avLst/>
+          </a:prstGeom>
+          <a:ln w="3600">
+            <a:solidFill>
+              <a:srgbClr val="12151C"/>
+            </a:solidFill>
+          </a:ln>
+        </p:spPr>
+      </p:cxnSp>
+      <p:cxnSp>
+        <p:nvCxnSpPr>
+          <p:cNvPr id="30" name="Connector 29"/>
+          <p:cNvCxnSpPr/>
+          <p:nvPr/>
+        </p:nvCxnSpPr>
+        <p:spPr>
+          <a:xfrm flipV="1">
+            <a:off x="3074400" y="590400"/>
+            <a:ext cx="165600" cy="165600"/>
+          </a:xfrm>
+          <a:prstGeom prst="line">
+            <a:avLst/>
+          </a:prstGeom>
+          <a:ln w="3600">
+            <a:solidFill>
+              <a:srgbClr val="12151C"/>
+            </a:solidFill>
+          </a:ln>
+        </p:spPr>
+      </p:cxnSp>
+      <p:cxnSp>
+        <p:nvCxnSpPr>
+          <p:cNvPr id="31" name="Connector 30"/>
+          <p:cNvCxnSpPr/>
+          <p:nvPr/>
+        </p:nvCxnSpPr>
+        <p:spPr>
+          <a:xfrm flipV="1">
+            <a:off x="3139200" y="655200"/>
+            <a:ext cx="100800" cy="100800"/>
+          </a:xfrm>
+          <a:prstGeom prst="line">
+            <a:avLst/>
+          </a:prstGeom>
+          <a:ln w="3600">
+            <a:solidFill>
+              <a:srgbClr val="12151C"/>
+            </a:solidFill>
+          </a:ln>
+        </p:spPr>
+      </p:cxnSp>
+      <p:cxnSp>
+        <p:nvCxnSpPr>
+          <p:cNvPr id="32" name="Connector 31"/>
+          <p:cNvCxnSpPr/>
+          <p:nvPr/>
+        </p:nvCxnSpPr>
+        <p:spPr>
+          <a:xfrm flipV="1">
+            <a:off x="3204000" y="720000"/>
+            <a:ext cx="36000" cy="36000"/>
+          </a:xfrm>
+          <a:prstGeom prst="line">
+            <a:avLst/>
+          </a:prstGeom>
+          <a:ln w="3600">
+            <a:solidFill>
+              <a:srgbClr val="12151C"/>
+            </a:solidFill>
+          </a:ln>
+        </p:spPr>
+      </p:cxnSp>
+      <p:sp>
+        <p:nvSpPr>
+          <p:cNvPr id="33" name="텍스트"/>
           <p:cNvSpPr txBox="1"/>
           <p:nvPr/>
         </p:nvSpPr>
         <p:spPr>
           <a:xfrm>
-            <a:off x="1584000" y="36000"/>
-            <a:ext cx="1656000" cy="1728000"/>
-          </a:xfrm>
-          <a:prstGeom prst="rect">
-            <a:avLst/>
-          </a:prstGeom>
-          <a:noFill/>
-        </p:spPr>
-        <p:txBody>
-          <a:bodyPr wrap="square" lIns="0" rIns="0" tIns="0" bIns="0" anchor="ctr">
-            <a:spAutoFit/>
-          </a:bodyPr>
-          <a:lstStyle/>
-          <a:p>
-            <a:pPr algn="ctr">
-              <a:lnSpc>
-                <a:spcPts val="18560"/>
-              </a:lnSpc>
-            </a:pPr>
-            <a:r>
-              <a:rPr sz="12800" b="1">
-                <a:solidFill>
-                  <a:srgbClr val="26292D"/>
-                </a:solidFill>
-                <a:latin typeface="맑은 고딕"/>
-                <a:ea typeface="맑은 고딕"/>
-              </a:rPr>
-              <a:t>황</a:t>
-            </a:r>
-          </a:p>
-        </p:txBody>
-      </p:sp>
-      <p:sp>
-        <p:nvSpPr>
-          <p:cNvPr id="3" name="텍스트"/>
-          <p:cNvSpPr txBox="1"/>
-          <p:nvPr/>
-        </p:nvSpPr>
-        <p:spPr>
-          <a:xfrm>
-            <a:off x="252000" y="223200"/>
-            <a:ext cx="1440000" cy="133351"/>
+            <a:off x="252000" y="252000"/>
+            <a:ext cx="1512000" cy="123826"/>
           </a:xfrm>
           <a:prstGeom prst="rect">
             <a:avLst/>
@@ -3161,11 +3780,11 @@
           <a:p>
             <a:pPr algn="l">
               <a:lnSpc>
-                <a:spcPts val="1015"/>
+                <a:spcPts val="942"/>
               </a:lnSpc>
             </a:pPr>
             <a:r>
-              <a:rPr sz="700" b="1" spc="200">
+              <a:rPr sz="650" b="1" spc="220">
                 <a:solidFill>
                   <a:srgbClr val="A3A9B5"/>
                 </a:solidFill>
@@ -3177,16 +3796,37 @@
           </a:p>
         </p:txBody>
       </p:sp>
-      <p:sp>
-        <p:nvSpPr>
-          <p:cNvPr id="4" name="텍스트"/>
+      <p:cxnSp>
+        <p:nvCxnSpPr>
+          <p:cNvPr id="34" name="Connector 33"/>
+          <p:cNvCxnSpPr/>
+          <p:nvPr/>
+        </p:nvCxnSpPr>
+        <p:spPr>
+          <a:xfrm>
+            <a:off x="252000" y="374400"/>
+            <a:ext cx="1548000" cy="0"/>
+          </a:xfrm>
+          <a:prstGeom prst="line">
+            <a:avLst/>
+          </a:prstGeom>
+          <a:ln w="3600">
+            <a:solidFill>
+              <a:srgbClr val="2A2F38"/>
+            </a:solidFill>
+          </a:ln>
+        </p:spPr>
+      </p:cxnSp>
+      <p:sp>
+        <p:nvSpPr>
+          <p:cNvPr id="35" name="텍스트"/>
           <p:cNvSpPr txBox="1"/>
           <p:nvPr/>
         </p:nvSpPr>
         <p:spPr>
           <a:xfrm>
-            <a:off x="252000" y="604800"/>
-            <a:ext cx="1656000" cy="360000"/>
+            <a:off x="252000" y="676800"/>
+            <a:ext cx="1800000" cy="237600"/>
           </a:xfrm>
           <a:prstGeom prst="rect">
             <a:avLst/>
@@ -3201,11 +3841,11 @@
           <a:p>
             <a:pPr algn="l">
               <a:lnSpc>
-                <a:spcPts val="3190"/>
+                <a:spcPts val="1957"/>
               </a:lnSpc>
             </a:pPr>
             <a:r>
-              <a:rPr sz="2200" b="1">
+              <a:rPr sz="1350" b="1" spc="120">
                 <a:solidFill>
                   <a:srgbClr val="FFFFFF"/>
                 </a:solidFill>
@@ -3219,14 +3859,14 @@
       </p:sp>
       <p:sp>
         <p:nvSpPr>
-          <p:cNvPr id="5" name="텍스트"/>
+          <p:cNvPr id="36" name="텍스트"/>
           <p:cNvSpPr txBox="1"/>
           <p:nvPr/>
         </p:nvSpPr>
         <p:spPr>
           <a:xfrm>
-            <a:off x="252000" y="1008000"/>
-            <a:ext cx="1656000" cy="171451"/>
+            <a:off x="252000" y="928800"/>
+            <a:ext cx="1800000" cy="133351"/>
           </a:xfrm>
           <a:prstGeom prst="rect">
             <a:avLst/>
@@ -3241,11 +3881,11 @@
           <a:p>
             <a:pPr algn="l">
               <a:lnSpc>
-                <a:spcPts val="1305"/>
+                <a:spcPts val="1015"/>
               </a:lnSpc>
             </a:pPr>
             <a:r>
-              <a:rPr sz="900" b="0">
+              <a:rPr sz="700" b="0" spc="60">
                 <a:solidFill>
                   <a:srgbClr val="A3A9B5"/>
                 </a:solidFill>
@@ -3259,43 +3899,14 @@
       </p:sp>
       <p:sp>
         <p:nvSpPr>
-          <p:cNvPr id="6" name="Rectangle 5"/>
-          <p:cNvSpPr/>
-          <p:nvPr/>
-        </p:nvSpPr>
-        <p:spPr>
-          <a:xfrm>
-            <a:off x="252000" y="1231200"/>
-            <a:ext cx="144000" cy="18000"/>
-          </a:xfrm>
-          <a:prstGeom prst="rect">
-            <a:avLst/>
-          </a:prstGeom>
-          <a:solidFill>
-            <a:srgbClr val="9B7BFF"/>
-          </a:solidFill>
-          <a:ln>
-            <a:noFill/>
-          </a:ln>
-        </p:spPr>
-        <p:txBody>
-          <a:bodyPr rtlCol="0" anchor="ctr"/>
-          <a:lstStyle/>
-          <a:p>
-            <a:pPr algn="ctr"/>
-          </a:p>
-        </p:txBody>
-      </p:sp>
-      <p:sp>
-        <p:nvSpPr>
-          <p:cNvPr id="7" name="텍스트"/>
+          <p:cNvPr id="37" name="텍스트"/>
           <p:cNvSpPr txBox="1"/>
           <p:nvPr/>
         </p:nvSpPr>
         <p:spPr>
           <a:xfrm>
-            <a:off x="252000" y="1350000"/>
-            <a:ext cx="331200" cy="99061"/>
+            <a:off x="252000" y="1339200"/>
+            <a:ext cx="900000" cy="91441"/>
           </a:xfrm>
           <a:prstGeom prst="rect">
             <a:avLst/>
@@ -3310,11 +3921,11 @@
           <a:p>
             <a:pPr algn="l">
               <a:lnSpc>
-                <a:spcPts val="754"/>
+                <a:spcPts val="696"/>
               </a:lnSpc>
             </a:pPr>
             <a:r>
-              <a:rPr sz="520" b="1" spc="120">
+              <a:rPr sz="480" b="1" spc="140">
                 <a:solidFill>
                   <a:srgbClr val="A3A9B5"/>
                 </a:solidFill>
@@ -3328,14 +3939,14 @@
       </p:sp>
       <p:sp>
         <p:nvSpPr>
-          <p:cNvPr id="8" name="텍스트"/>
+          <p:cNvPr id="38" name="텍스트"/>
           <p:cNvSpPr txBox="1"/>
           <p:nvPr/>
         </p:nvSpPr>
         <p:spPr>
           <a:xfrm>
-            <a:off x="583200" y="1339200"/>
-            <a:ext cx="1296000" cy="129541"/>
+            <a:off x="252000" y="1440000"/>
+            <a:ext cx="900000" cy="123826"/>
           </a:xfrm>
           <a:prstGeom prst="rect">
             <a:avLst/>
@@ -3350,11 +3961,11 @@
           <a:p>
             <a:pPr algn="l">
               <a:lnSpc>
-                <a:spcPts val="986"/>
+                <a:spcPts val="942"/>
               </a:lnSpc>
             </a:pPr>
             <a:r>
-              <a:rPr sz="680" b="0">
+              <a:rPr sz="650" b="0">
                 <a:solidFill>
                   <a:srgbClr val="FFFFFF"/>
                 </a:solidFill>
@@ -3366,16 +3977,37 @@
           </a:p>
         </p:txBody>
       </p:sp>
-      <p:sp>
-        <p:nvSpPr>
-          <p:cNvPr id="9" name="텍스트"/>
+      <p:cxnSp>
+        <p:nvCxnSpPr>
+          <p:cNvPr id="39" name="Connector 38"/>
+          <p:cNvCxnSpPr/>
+          <p:nvPr/>
+        </p:nvCxnSpPr>
+        <p:spPr>
+          <a:xfrm>
+            <a:off x="1072800" y="1339200"/>
+            <a:ext cx="0" cy="201600"/>
+          </a:xfrm>
+          <a:prstGeom prst="line">
+            <a:avLst/>
+          </a:prstGeom>
+          <a:ln w="3600">
+            <a:solidFill>
+              <a:srgbClr val="2A2F38"/>
+            </a:solidFill>
+          </a:ln>
+        </p:spPr>
+      </p:cxnSp>
+      <p:sp>
+        <p:nvSpPr>
+          <p:cNvPr id="40" name="텍스트"/>
           <p:cNvSpPr txBox="1"/>
           <p:nvPr/>
         </p:nvSpPr>
         <p:spPr>
           <a:xfrm>
-            <a:off x="252000" y="1472400"/>
-            <a:ext cx="331200" cy="99061"/>
+            <a:off x="1152000" y="1339200"/>
+            <a:ext cx="972000" cy="91441"/>
           </a:xfrm>
           <a:prstGeom prst="rect">
             <a:avLst/>
@@ -3390,11 +4022,11 @@
           <a:p>
             <a:pPr algn="l">
               <a:lnSpc>
-                <a:spcPts val="754"/>
+                <a:spcPts val="696"/>
               </a:lnSpc>
             </a:pPr>
             <a:r>
-              <a:rPr sz="520" b="1" spc="120">
+              <a:rPr sz="480" b="1" spc="140">
                 <a:solidFill>
                   <a:srgbClr val="A3A9B5"/>
                 </a:solidFill>
@@ -3408,14 +4040,14 @@
       </p:sp>
       <p:sp>
         <p:nvSpPr>
-          <p:cNvPr id="10" name="텍스트"/>
+          <p:cNvPr id="41" name="텍스트"/>
           <p:cNvSpPr txBox="1"/>
           <p:nvPr/>
         </p:nvSpPr>
         <p:spPr>
           <a:xfrm>
-            <a:off x="583200" y="1461600"/>
-            <a:ext cx="1296000" cy="129541"/>
+            <a:off x="1152000" y="1440000"/>
+            <a:ext cx="972000" cy="123826"/>
           </a:xfrm>
           <a:prstGeom prst="rect">
             <a:avLst/>
@@ -3430,11 +4062,11 @@
           <a:p>
             <a:pPr algn="l">
               <a:lnSpc>
-                <a:spcPts val="986"/>
+                <a:spcPts val="942"/>
               </a:lnSpc>
             </a:pPr>
             <a:r>
-              <a:rPr sz="680" b="0">
+              <a:rPr sz="650" b="0">
                 <a:solidFill>
                   <a:srgbClr val="FFFFFF"/>
                 </a:solidFill>
@@ -3446,16 +4078,37 @@
           </a:p>
         </p:txBody>
       </p:sp>
-      <p:sp>
-        <p:nvSpPr>
-          <p:cNvPr id="11" name="텍스트"/>
+      <p:cxnSp>
+        <p:nvCxnSpPr>
+          <p:cNvPr id="42" name="Connector 41"/>
+          <p:cNvCxnSpPr/>
+          <p:nvPr/>
+        </p:nvCxnSpPr>
+        <p:spPr>
+          <a:xfrm>
+            <a:off x="2044800" y="1339200"/>
+            <a:ext cx="0" cy="201600"/>
+          </a:xfrm>
+          <a:prstGeom prst="line">
+            <a:avLst/>
+          </a:prstGeom>
+          <a:ln w="3600">
+            <a:solidFill>
+              <a:srgbClr val="2A2F38"/>
+            </a:solidFill>
+          </a:ln>
+        </p:spPr>
+      </p:cxnSp>
+      <p:sp>
+        <p:nvSpPr>
+          <p:cNvPr id="43" name="텍스트"/>
           <p:cNvSpPr txBox="1"/>
           <p:nvPr/>
         </p:nvSpPr>
         <p:spPr>
           <a:xfrm>
-            <a:off x="252000" y="1594800"/>
-            <a:ext cx="331200" cy="99061"/>
+            <a:off x="2124000" y="1339200"/>
+            <a:ext cx="972000" cy="91441"/>
           </a:xfrm>
           <a:prstGeom prst="rect">
             <a:avLst/>
@@ -3470,11 +4123,11 @@
           <a:p>
             <a:pPr algn="l">
               <a:lnSpc>
-                <a:spcPts val="754"/>
+                <a:spcPts val="696"/>
               </a:lnSpc>
             </a:pPr>
             <a:r>
-              <a:rPr sz="520" b="1" spc="120">
+              <a:rPr sz="480" b="1" spc="140">
                 <a:solidFill>
                   <a:srgbClr val="A3A9B5"/>
                 </a:solidFill>
@@ -3488,14 +4141,14 @@
       </p:sp>
       <p:sp>
         <p:nvSpPr>
-          <p:cNvPr id="12" name="텍스트"/>
+          <p:cNvPr id="44" name="텍스트"/>
           <p:cNvSpPr txBox="1"/>
           <p:nvPr/>
         </p:nvSpPr>
         <p:spPr>
           <a:xfrm>
-            <a:off x="583200" y="1584000"/>
-            <a:ext cx="1296000" cy="129541"/>
+            <a:off x="2124000" y="1440000"/>
+            <a:ext cx="972000" cy="123826"/>
           </a:xfrm>
           <a:prstGeom prst="rect">
             <a:avLst/>
@@ -3510,11 +4163,11 @@
           <a:p>
             <a:pPr algn="l">
               <a:lnSpc>
-                <a:spcPts val="986"/>
+                <a:spcPts val="942"/>
               </a:lnSpc>
             </a:pPr>
             <a:r>
-              <a:rPr sz="680" b="0">
+              <a:rPr sz="650" b="0">
                 <a:solidFill>
                   <a:srgbClr val="FFFFFF"/>
                 </a:solidFill>
@@ -3554,14 +4207,54 @@
       <p:grpSpPr/>
       <p:sp>
         <p:nvSpPr>
-          <p:cNvPr id="2" name="Rectangle 1"/>
+          <p:cNvPr id="2" name="텍스트"/>
+          <p:cNvSpPr txBox="1"/>
+          <p:nvPr/>
+        </p:nvSpPr>
+        <p:spPr>
+          <a:xfrm>
+            <a:off x="252000" y="252000"/>
+            <a:ext cx="1080000" cy="99061"/>
+          </a:xfrm>
+          <a:prstGeom prst="rect">
+            <a:avLst/>
+          </a:prstGeom>
+          <a:noFill/>
+        </p:spPr>
+        <p:txBody>
+          <a:bodyPr wrap="square" lIns="0" rIns="0" tIns="0" bIns="0" anchor="t">
+            <a:spAutoFit/>
+          </a:bodyPr>
+          <a:lstStyle/>
+          <a:p>
+            <a:pPr algn="l">
+              <a:lnSpc>
+                <a:spcPts val="754"/>
+              </a:lnSpc>
+            </a:pPr>
+            <a:r>
+              <a:rPr sz="520" b="1" spc="240">
+                <a:solidFill>
+                  <a:srgbClr val="6B7280"/>
+                </a:solidFill>
+                <a:latin typeface="맑은 고딕"/>
+                <a:ea typeface="맑은 고딕"/>
+              </a:rPr>
+              <a:t>전문 분야</a:t>
+            </a:r>
+          </a:p>
+        </p:txBody>
+      </p:sp>
+      <p:sp>
+        <p:nvSpPr>
+          <p:cNvPr id="3" name="Rectangle 2"/>
           <p:cNvSpPr/>
           <p:nvPr/>
         </p:nvSpPr>
         <p:spPr>
           <a:xfrm>
-            <a:off x="0" y="0"/>
-            <a:ext cx="3240000" cy="1800000"/>
+            <a:off x="252000" y="352800"/>
+            <a:ext cx="108000" cy="14400"/>
           </a:xfrm>
           <a:prstGeom prst="rect">
             <a:avLst/>
@@ -3581,132 +4274,37 @@
           </a:p>
         </p:txBody>
       </p:sp>
-      <p:sp>
-        <p:nvSpPr>
-          <p:cNvPr id="3" name="Freeform 2"/>
-          <p:cNvSpPr/>
-          <p:nvPr/>
-        </p:nvSpPr>
-        <p:spPr>
-          <a:xfrm>
-            <a:off x="2412000" y="972000"/>
-            <a:ext cx="828000" cy="828000"/>
-          </a:xfrm>
-          <a:custGeom>
-            <a:avLst/>
-            <a:gdLst/>
-            <a:ahLst/>
-            <a:cxnLst/>
-            <a:rect l="l" t="t" r="r" b="b"/>
-            <a:pathLst>
-              <a:path w="828000" h="828000">
-                <a:moveTo>
-                  <a:pt x="828000" y="828000"/>
-                </a:moveTo>
-                <a:lnTo>
-                  <a:pt x="0" y="828000"/>
-                </a:lnTo>
-                <a:lnTo>
-                  <a:pt x="1773" y="773846"/>
-                </a:lnTo>
-                <a:lnTo>
-                  <a:pt x="7084" y="719924"/>
-                </a:lnTo>
-                <a:lnTo>
-                  <a:pt x="15910" y="666465"/>
-                </a:lnTo>
-                <a:lnTo>
-                  <a:pt x="28213" y="613698"/>
-                </a:lnTo>
-                <a:lnTo>
-                  <a:pt x="43942" y="561848"/>
-                </a:lnTo>
-                <a:lnTo>
-                  <a:pt x="63028" y="511138"/>
-                </a:lnTo>
-                <a:lnTo>
-                  <a:pt x="85389" y="461785"/>
-                </a:lnTo>
-                <a:lnTo>
-                  <a:pt x="110931" y="414000"/>
-                </a:lnTo>
-                <a:lnTo>
-                  <a:pt x="139543" y="367988"/>
-                </a:lnTo>
-                <a:lnTo>
-                  <a:pt x="171103" y="323946"/>
-                </a:lnTo>
-                <a:lnTo>
-                  <a:pt x="205477" y="282062"/>
-                </a:lnTo>
-                <a:lnTo>
-                  <a:pt x="242516" y="242516"/>
-                </a:lnTo>
-                <a:lnTo>
-                  <a:pt x="282062" y="205477"/>
-                </a:lnTo>
-                <a:lnTo>
-                  <a:pt x="323946" y="171103"/>
-                </a:lnTo>
-                <a:lnTo>
-                  <a:pt x="367988" y="139543"/>
-                </a:lnTo>
-                <a:lnTo>
-                  <a:pt x="414000" y="110931"/>
-                </a:lnTo>
-                <a:lnTo>
-                  <a:pt x="461785" y="85389"/>
-                </a:lnTo>
-                <a:lnTo>
-                  <a:pt x="511138" y="63028"/>
-                </a:lnTo>
-                <a:lnTo>
-                  <a:pt x="561848" y="43942"/>
-                </a:lnTo>
-                <a:lnTo>
-                  <a:pt x="613698" y="28213"/>
-                </a:lnTo>
-                <a:lnTo>
-                  <a:pt x="666465" y="15910"/>
-                </a:lnTo>
-                <a:lnTo>
-                  <a:pt x="719924" y="7084"/>
-                </a:lnTo>
-                <a:lnTo>
-                  <a:pt x="773846" y="1773"/>
-                </a:lnTo>
-                <a:lnTo>
-                  <a:pt x="828000" y="0"/>
-                </a:lnTo>
-                <a:close/>
-              </a:path>
-            </a:pathLst>
-          </a:custGeom>
-          <a:solidFill>
-            <a:srgbClr val="B198FF"/>
-          </a:solidFill>
-          <a:ln>
-            <a:noFill/>
+      <p:cxnSp>
+        <p:nvCxnSpPr>
+          <p:cNvPr id="4" name="Connector 3"/>
+          <p:cNvCxnSpPr/>
+          <p:nvPr/>
+        </p:nvCxnSpPr>
+        <p:spPr>
+          <a:xfrm>
+            <a:off x="252000" y="453600"/>
+            <a:ext cx="1512000" cy="0"/>
+          </a:xfrm>
+          <a:prstGeom prst="line">
+            <a:avLst/>
+          </a:prstGeom>
+          <a:ln w="3600">
+            <a:solidFill>
+              <a:srgbClr val="E3E5E9"/>
+            </a:solidFill>
           </a:ln>
         </p:spPr>
-        <p:txBody>
-          <a:bodyPr rtlCol="0" anchor="ctr"/>
-          <a:lstStyle/>
-          <a:p>
-            <a:pPr algn="ctr"/>
-          </a:p>
-        </p:txBody>
-      </p:sp>
-      <p:sp>
-        <p:nvSpPr>
-          <p:cNvPr id="4" name="텍스트"/>
+      </p:cxnSp>
+      <p:sp>
+        <p:nvSpPr>
+          <p:cNvPr id="5" name="텍스트"/>
           <p:cNvSpPr txBox="1"/>
           <p:nvPr/>
         </p:nvSpPr>
         <p:spPr>
           <a:xfrm>
-            <a:off x="252000" y="432000"/>
-            <a:ext cx="2304000" cy="720000"/>
+            <a:off x="252000" y="507600"/>
+            <a:ext cx="216000" cy="95251"/>
           </a:xfrm>
           <a:prstGeom prst="rect">
             <a:avLst/>
@@ -3721,49 +4319,234 @@
           <a:p>
             <a:pPr algn="l">
               <a:lnSpc>
-                <a:spcPts val="1884"/>
+                <a:spcPts val="725"/>
               </a:lnSpc>
             </a:pPr>
             <a:r>
-              <a:rPr sz="1300" b="1">
+              <a:rPr sz="500" b="1" spc="100">
+                <a:solidFill>
+                  <a:srgbClr val="6B7280"/>
+                </a:solidFill>
+                <a:latin typeface="맑은 고딕"/>
+                <a:ea typeface="맑은 고딕"/>
+              </a:rPr>
+              <a:t>01</a:t>
+            </a:r>
+          </a:p>
+        </p:txBody>
+      </p:sp>
+      <p:sp>
+        <p:nvSpPr>
+          <p:cNvPr id="6" name="텍스트"/>
+          <p:cNvSpPr txBox="1"/>
+          <p:nvPr/>
+        </p:nvSpPr>
+        <p:spPr>
+          <a:xfrm>
+            <a:off x="489600" y="496800"/>
+            <a:ext cx="1260000" cy="133351"/>
+          </a:xfrm>
+          <a:prstGeom prst="rect">
+            <a:avLst/>
+          </a:prstGeom>
+          <a:noFill/>
+        </p:spPr>
+        <p:txBody>
+          <a:bodyPr wrap="square" lIns="0" rIns="0" tIns="0" bIns="0" anchor="t">
+            <a:spAutoFit/>
+          </a:bodyPr>
+          <a:lstStyle/>
+          <a:p>
+            <a:pPr algn="l">
+              <a:lnSpc>
+                <a:spcPts val="1015"/>
+              </a:lnSpc>
+            </a:pPr>
+            <a:r>
+              <a:rPr sz="700" b="0">
                 <a:solidFill>
                   <a:srgbClr val="12151C"/>
                 </a:solidFill>
                 <a:latin typeface="맑은 고딕"/>
                 <a:ea typeface="맑은 고딕"/>
               </a:rPr>
-              <a:t>자유롭게 일하되</a:t>
-            </a:r>
-          </a:p>
+              <a:t>번역</a:t>
+            </a:r>
+          </a:p>
+        </p:txBody>
+      </p:sp>
+      <p:cxnSp>
+        <p:nvCxnSpPr>
+          <p:cNvPr id="7" name="Connector 6"/>
+          <p:cNvCxnSpPr/>
+          <p:nvPr/>
+        </p:nvCxnSpPr>
+        <p:spPr>
+          <a:xfrm>
+            <a:off x="252000" y="640800"/>
+            <a:ext cx="1512000" cy="0"/>
+          </a:xfrm>
+          <a:prstGeom prst="line">
+            <a:avLst/>
+          </a:prstGeom>
+          <a:ln w="3600">
+            <a:solidFill>
+              <a:srgbClr val="E3E5E9"/>
+            </a:solidFill>
+          </a:ln>
+        </p:spPr>
+      </p:cxnSp>
+      <p:sp>
+        <p:nvSpPr>
+          <p:cNvPr id="8" name="텍스트"/>
+          <p:cNvSpPr txBox="1"/>
+          <p:nvPr/>
+        </p:nvSpPr>
+        <p:spPr>
+          <a:xfrm>
+            <a:off x="252000" y="694800"/>
+            <a:ext cx="216000" cy="95251"/>
+          </a:xfrm>
+          <a:prstGeom prst="rect">
+            <a:avLst/>
+          </a:prstGeom>
+          <a:noFill/>
+        </p:spPr>
+        <p:txBody>
+          <a:bodyPr wrap="square" lIns="0" rIns="0" tIns="0" bIns="0" anchor="t">
+            <a:spAutoFit/>
+          </a:bodyPr>
+          <a:lstStyle/>
           <a:p>
             <a:pPr algn="l">
               <a:lnSpc>
-                <a:spcPts val="1884"/>
+                <a:spcPts val="725"/>
               </a:lnSpc>
             </a:pPr>
             <a:r>
-              <a:rPr sz="1300" b="1">
+              <a:rPr sz="500" b="1" spc="100">
+                <a:solidFill>
+                  <a:srgbClr val="6B7280"/>
+                </a:solidFill>
+                <a:latin typeface="맑은 고딕"/>
+                <a:ea typeface="맑은 고딕"/>
+              </a:rPr>
+              <a:t>02</a:t>
+            </a:r>
+          </a:p>
+        </p:txBody>
+      </p:sp>
+      <p:sp>
+        <p:nvSpPr>
+          <p:cNvPr id="9" name="텍스트"/>
+          <p:cNvSpPr txBox="1"/>
+          <p:nvPr/>
+        </p:nvSpPr>
+        <p:spPr>
+          <a:xfrm>
+            <a:off x="489600" y="684000"/>
+            <a:ext cx="1260000" cy="133351"/>
+          </a:xfrm>
+          <a:prstGeom prst="rect">
+            <a:avLst/>
+          </a:prstGeom>
+          <a:noFill/>
+        </p:spPr>
+        <p:txBody>
+          <a:bodyPr wrap="square" lIns="0" rIns="0" tIns="0" bIns="0" anchor="t">
+            <a:spAutoFit/>
+          </a:bodyPr>
+          <a:lstStyle/>
+          <a:p>
+            <a:pPr algn="l">
+              <a:lnSpc>
+                <a:spcPts val="1015"/>
+              </a:lnSpc>
+            </a:pPr>
+            <a:r>
+              <a:rPr sz="700" b="0">
                 <a:solidFill>
                   <a:srgbClr val="12151C"/>
                 </a:solidFill>
                 <a:latin typeface="맑은 고딕"/>
                 <a:ea typeface="맑은 고딕"/>
               </a:rPr>
-              <a:t>책임은 무겁게</a:t>
-            </a:r>
-          </a:p>
-        </p:txBody>
-      </p:sp>
-      <p:sp>
-        <p:nvSpPr>
-          <p:cNvPr id="5" name="텍스트"/>
+              <a:t>카피라이팅</a:t>
+            </a:r>
+          </a:p>
+        </p:txBody>
+      </p:sp>
+      <p:cxnSp>
+        <p:nvCxnSpPr>
+          <p:cNvPr id="10" name="Connector 9"/>
+          <p:cNvCxnSpPr/>
+          <p:nvPr/>
+        </p:nvCxnSpPr>
+        <p:spPr>
+          <a:xfrm>
+            <a:off x="252000" y="828000"/>
+            <a:ext cx="1512000" cy="0"/>
+          </a:xfrm>
+          <a:prstGeom prst="line">
+            <a:avLst/>
+          </a:prstGeom>
+          <a:ln w="3600">
+            <a:solidFill>
+              <a:srgbClr val="E3E5E9"/>
+            </a:solidFill>
+          </a:ln>
+        </p:spPr>
+      </p:cxnSp>
+      <p:sp>
+        <p:nvSpPr>
+          <p:cNvPr id="11" name="텍스트"/>
           <p:cNvSpPr txBox="1"/>
           <p:nvPr/>
         </p:nvSpPr>
         <p:spPr>
           <a:xfrm>
-            <a:off x="252000" y="1476000"/>
-            <a:ext cx="1800000" cy="133351"/>
+            <a:off x="252000" y="882000"/>
+            <a:ext cx="216000" cy="95251"/>
+          </a:xfrm>
+          <a:prstGeom prst="rect">
+            <a:avLst/>
+          </a:prstGeom>
+          <a:noFill/>
+        </p:spPr>
+        <p:txBody>
+          <a:bodyPr wrap="square" lIns="0" rIns="0" tIns="0" bIns="0" anchor="t">
+            <a:spAutoFit/>
+          </a:bodyPr>
+          <a:lstStyle/>
+          <a:p>
+            <a:pPr algn="l">
+              <a:lnSpc>
+                <a:spcPts val="725"/>
+              </a:lnSpc>
+            </a:pPr>
+            <a:r>
+              <a:rPr sz="500" b="1" spc="100">
+                <a:solidFill>
+                  <a:srgbClr val="6B7280"/>
+                </a:solidFill>
+                <a:latin typeface="맑은 고딕"/>
+                <a:ea typeface="맑은 고딕"/>
+              </a:rPr>
+              <a:t>03</a:t>
+            </a:r>
+          </a:p>
+        </p:txBody>
+      </p:sp>
+      <p:sp>
+        <p:nvSpPr>
+          <p:cNvPr id="12" name="텍스트"/>
+          <p:cNvSpPr txBox="1"/>
+          <p:nvPr/>
+        </p:nvSpPr>
+        <p:spPr>
+          <a:xfrm>
+            <a:off x="489600" y="871200"/>
+            <a:ext cx="1260000" cy="133351"/>
           </a:xfrm>
           <a:prstGeom prst="rect">
             <a:avLst/>
@@ -3782,7 +4565,383 @@
               </a:lnSpc>
             </a:pPr>
             <a:r>
-              <a:rPr sz="700" b="1" spc="200">
+              <a:rPr sz="700" b="0">
+                <a:solidFill>
+                  <a:srgbClr val="12151C"/>
+                </a:solidFill>
+                <a:latin typeface="맑은 고딕"/>
+                <a:ea typeface="맑은 고딕"/>
+              </a:rPr>
+              <a:t>데이터 분석</a:t>
+            </a:r>
+          </a:p>
+        </p:txBody>
+      </p:sp>
+      <p:cxnSp>
+        <p:nvCxnSpPr>
+          <p:cNvPr id="13" name="Connector 12"/>
+          <p:cNvCxnSpPr/>
+          <p:nvPr/>
+        </p:nvCxnSpPr>
+        <p:spPr>
+          <a:xfrm>
+            <a:off x="252000" y="1015200"/>
+            <a:ext cx="1512000" cy="0"/>
+          </a:xfrm>
+          <a:prstGeom prst="line">
+            <a:avLst/>
+          </a:prstGeom>
+          <a:ln w="3600">
+            <a:solidFill>
+              <a:srgbClr val="E3E5E9"/>
+            </a:solidFill>
+          </a:ln>
+        </p:spPr>
+      </p:cxnSp>
+      <p:sp>
+        <p:nvSpPr>
+          <p:cNvPr id="14" name="텍스트"/>
+          <p:cNvSpPr txBox="1"/>
+          <p:nvPr/>
+        </p:nvSpPr>
+        <p:spPr>
+          <a:xfrm>
+            <a:off x="252000" y="1069200"/>
+            <a:ext cx="216000" cy="95251"/>
+          </a:xfrm>
+          <a:prstGeom prst="rect">
+            <a:avLst/>
+          </a:prstGeom>
+          <a:noFill/>
+        </p:spPr>
+        <p:txBody>
+          <a:bodyPr wrap="square" lIns="0" rIns="0" tIns="0" bIns="0" anchor="t">
+            <a:spAutoFit/>
+          </a:bodyPr>
+          <a:lstStyle/>
+          <a:p>
+            <a:pPr algn="l">
+              <a:lnSpc>
+                <a:spcPts val="725"/>
+              </a:lnSpc>
+            </a:pPr>
+            <a:r>
+              <a:rPr sz="500" b="1" spc="100">
+                <a:solidFill>
+                  <a:srgbClr val="6B7280"/>
+                </a:solidFill>
+                <a:latin typeface="맑은 고딕"/>
+                <a:ea typeface="맑은 고딕"/>
+              </a:rPr>
+              <a:t>04</a:t>
+            </a:r>
+          </a:p>
+        </p:txBody>
+      </p:sp>
+      <p:sp>
+        <p:nvSpPr>
+          <p:cNvPr id="15" name="텍스트"/>
+          <p:cNvSpPr txBox="1"/>
+          <p:nvPr/>
+        </p:nvSpPr>
+        <p:spPr>
+          <a:xfrm>
+            <a:off x="489600" y="1058400"/>
+            <a:ext cx="1260000" cy="133351"/>
+          </a:xfrm>
+          <a:prstGeom prst="rect">
+            <a:avLst/>
+          </a:prstGeom>
+          <a:noFill/>
+        </p:spPr>
+        <p:txBody>
+          <a:bodyPr wrap="square" lIns="0" rIns="0" tIns="0" bIns="0" anchor="t">
+            <a:spAutoFit/>
+          </a:bodyPr>
+          <a:lstStyle/>
+          <a:p>
+            <a:pPr algn="l">
+              <a:lnSpc>
+                <a:spcPts val="1015"/>
+              </a:lnSpc>
+            </a:pPr>
+            <a:r>
+              <a:rPr sz="700" b="0">
+                <a:solidFill>
+                  <a:srgbClr val="12151C"/>
+                </a:solidFill>
+                <a:latin typeface="맑은 고딕"/>
+                <a:ea typeface="맑은 고딕"/>
+              </a:rPr>
+              <a:t>자문</a:t>
+            </a:r>
+          </a:p>
+        </p:txBody>
+      </p:sp>
+      <p:cxnSp>
+        <p:nvCxnSpPr>
+          <p:cNvPr id="16" name="Connector 15"/>
+          <p:cNvCxnSpPr/>
+          <p:nvPr/>
+        </p:nvCxnSpPr>
+        <p:spPr>
+          <a:xfrm>
+            <a:off x="252000" y="1202400"/>
+            <a:ext cx="1512000" cy="0"/>
+          </a:xfrm>
+          <a:prstGeom prst="line">
+            <a:avLst/>
+          </a:prstGeom>
+          <a:ln w="3600">
+            <a:solidFill>
+              <a:srgbClr val="E3E5E9"/>
+            </a:solidFill>
+          </a:ln>
+        </p:spPr>
+      </p:cxnSp>
+      <p:sp>
+        <p:nvSpPr>
+          <p:cNvPr id="17" name="Rectangle 16"/>
+          <p:cNvSpPr/>
+          <p:nvPr/>
+        </p:nvSpPr>
+        <p:spPr>
+          <a:xfrm>
+            <a:off x="2088000" y="252000"/>
+            <a:ext cx="900000" cy="1296000"/>
+          </a:xfrm>
+          <a:prstGeom prst="rect">
+            <a:avLst/>
+          </a:prstGeom>
+          <a:solidFill>
+            <a:srgbClr val="9B7BFF"/>
+          </a:solidFill>
+          <a:ln>
+            <a:noFill/>
+          </a:ln>
+        </p:spPr>
+        <p:txBody>
+          <a:bodyPr rtlCol="0" anchor="ctr"/>
+          <a:lstStyle/>
+          <a:p>
+            <a:pPr algn="ctr"/>
+          </a:p>
+        </p:txBody>
+      </p:sp>
+      <p:sp>
+        <p:nvSpPr>
+          <p:cNvPr id="18" name="텍스트"/>
+          <p:cNvSpPr txBox="1"/>
+          <p:nvPr/>
+        </p:nvSpPr>
+        <p:spPr>
+          <a:xfrm>
+            <a:off x="2196000" y="360000"/>
+            <a:ext cx="684000" cy="95251"/>
+          </a:xfrm>
+          <a:prstGeom prst="rect">
+            <a:avLst/>
+          </a:prstGeom>
+          <a:noFill/>
+        </p:spPr>
+        <p:txBody>
+          <a:bodyPr wrap="square" lIns="0" rIns="0" tIns="0" bIns="0" anchor="t">
+            <a:spAutoFit/>
+          </a:bodyPr>
+          <a:lstStyle/>
+          <a:p>
+            <a:pPr algn="l">
+              <a:lnSpc>
+                <a:spcPts val="725"/>
+              </a:lnSpc>
+            </a:pPr>
+            <a:r>
+              <a:rPr sz="500" b="1" spc="240">
+                <a:solidFill>
+                  <a:srgbClr val="12151C">
+                    <a:alpha val="75000"/>
+                  </a:srgbClr>
+                </a:solidFill>
+                <a:latin typeface="맑은 고딕"/>
+                <a:ea typeface="맑은 고딕"/>
+              </a:rPr>
+              <a:t>INFO</a:t>
+            </a:r>
+          </a:p>
+        </p:txBody>
+      </p:sp>
+      <p:sp>
+        <p:nvSpPr>
+          <p:cNvPr id="19" name="텍스트"/>
+          <p:cNvSpPr txBox="1"/>
+          <p:nvPr/>
+        </p:nvSpPr>
+        <p:spPr>
+          <a:xfrm>
+            <a:off x="2196000" y="504000"/>
+            <a:ext cx="684000" cy="121921"/>
+          </a:xfrm>
+          <a:prstGeom prst="rect">
+            <a:avLst/>
+          </a:prstGeom>
+          <a:noFill/>
+        </p:spPr>
+        <p:txBody>
+          <a:bodyPr wrap="square" lIns="0" rIns="0" tIns="0" bIns="0" anchor="t">
+            <a:spAutoFit/>
+          </a:bodyPr>
+          <a:lstStyle/>
+          <a:p>
+            <a:pPr algn="l">
+              <a:lnSpc>
+                <a:spcPts val="927"/>
+              </a:lnSpc>
+            </a:pPr>
+            <a:r>
+              <a:rPr sz="640" b="1">
+                <a:solidFill>
+                  <a:srgbClr val="12151C"/>
+                </a:solidFill>
+                <a:latin typeface="맑은 고딕"/>
+                <a:ea typeface="맑은 고딕"/>
+              </a:rPr>
+              <a:t>메일 · 메시지 문의</a:t>
+            </a:r>
+          </a:p>
+        </p:txBody>
+      </p:sp>
+      <p:cxnSp>
+        <p:nvCxnSpPr>
+          <p:cNvPr id="20" name="Connector 19"/>
+          <p:cNvCxnSpPr/>
+          <p:nvPr/>
+        </p:nvCxnSpPr>
+        <p:spPr>
+          <a:xfrm>
+            <a:off x="2196000" y="770400"/>
+            <a:ext cx="684000" cy="0"/>
+          </a:xfrm>
+          <a:prstGeom prst="line">
+            <a:avLst/>
+          </a:prstGeom>
+          <a:ln w="3600">
+            <a:solidFill>
+              <a:srgbClr val="12151C"/>
+            </a:solidFill>
+          </a:ln>
+        </p:spPr>
+      </p:cxnSp>
+      <p:sp>
+        <p:nvSpPr>
+          <p:cNvPr id="21" name="텍스트"/>
+          <p:cNvSpPr txBox="1"/>
+          <p:nvPr/>
+        </p:nvSpPr>
+        <p:spPr>
+          <a:xfrm>
+            <a:off x="2196000" y="849600"/>
+            <a:ext cx="684000" cy="91441"/>
+          </a:xfrm>
+          <a:prstGeom prst="rect">
+            <a:avLst/>
+          </a:prstGeom>
+          <a:noFill/>
+        </p:spPr>
+        <p:txBody>
+          <a:bodyPr wrap="square" lIns="0" rIns="0" tIns="0" bIns="0" anchor="t">
+            <a:spAutoFit/>
+          </a:bodyPr>
+          <a:lstStyle/>
+          <a:p>
+            <a:pPr algn="l">
+              <a:lnSpc>
+                <a:spcPts val="696"/>
+              </a:lnSpc>
+            </a:pPr>
+            <a:r>
+              <a:rPr sz="480" b="1" spc="140">
+                <a:solidFill>
+                  <a:srgbClr val="12151C">
+                    <a:alpha val="75000"/>
+                  </a:srgbClr>
+                </a:solidFill>
+                <a:latin typeface="맑은 고딕"/>
+                <a:ea typeface="맑은 고딕"/>
+              </a:rPr>
+              <a:t>KAKAO</a:t>
+            </a:r>
+          </a:p>
+        </p:txBody>
+      </p:sp>
+      <p:sp>
+        <p:nvSpPr>
+          <p:cNvPr id="22" name="텍스트"/>
+          <p:cNvSpPr txBox="1"/>
+          <p:nvPr/>
+        </p:nvSpPr>
+        <p:spPr>
+          <a:xfrm>
+            <a:off x="2196000" y="957600"/>
+            <a:ext cx="684000" cy="121921"/>
+          </a:xfrm>
+          <a:prstGeom prst="rect">
+            <a:avLst/>
+          </a:prstGeom>
+          <a:noFill/>
+        </p:spPr>
+        <p:txBody>
+          <a:bodyPr wrap="square" lIns="0" rIns="0" tIns="0" bIns="0" anchor="t">
+            <a:spAutoFit/>
+          </a:bodyPr>
+          <a:lstStyle/>
+          <a:p>
+            <a:pPr algn="l">
+              <a:lnSpc>
+                <a:spcPts val="927"/>
+              </a:lnSpc>
+            </a:pPr>
+            <a:r>
+              <a:rPr sz="640" b="1">
+                <a:solidFill>
+                  <a:srgbClr val="12151C"/>
+                </a:solidFill>
+                <a:latin typeface="맑은 고딕"/>
+                <a:ea typeface="맑은 고딕"/>
+              </a:rPr>
+              <a:t>@채널아이디</a:t>
+            </a:r>
+          </a:p>
+        </p:txBody>
+      </p:sp>
+      <p:sp>
+        <p:nvSpPr>
+          <p:cNvPr id="23" name="텍스트"/>
+          <p:cNvSpPr txBox="1"/>
+          <p:nvPr/>
+        </p:nvSpPr>
+        <p:spPr>
+          <a:xfrm>
+            <a:off x="2196000" y="1368000"/>
+            <a:ext cx="720000" cy="106681"/>
+          </a:xfrm>
+          <a:prstGeom prst="rect">
+            <a:avLst/>
+          </a:prstGeom>
+          <a:noFill/>
+        </p:spPr>
+        <p:txBody>
+          <a:bodyPr wrap="square" lIns="0" rIns="0" tIns="0" bIns="0" anchor="t">
+            <a:spAutoFit/>
+          </a:bodyPr>
+          <a:lstStyle/>
+          <a:p>
+            <a:pPr algn="l">
+              <a:lnSpc>
+                <a:spcPts val="811"/>
+              </a:lnSpc>
+            </a:pPr>
+            <a:r>
+              <a:rPr sz="560" b="1" spc="80">
                 <a:solidFill>
                   <a:srgbClr val="12151C"/>
                 </a:solidFill>
